--- a/media/exports/services-sample-statements.pptx
+++ b/media/exports/services-sample-statements.pptx
@@ -147,7 +147,7 @@
             <c:idx val="0"/>
             <c:spPr>
               <a:solidFill>
-                <a:srgbClr val="0E9F6E"/>
+                <a:srgbClr val="7D8790"/>
               </a:solidFill>
             </c:spPr>
           </c:dPt>
@@ -155,7 +155,7 @@
             <c:idx val="1"/>
             <c:spPr>
               <a:solidFill>
-                <a:srgbClr val="0E9F6E"/>
+                <a:srgbClr val="7D8790"/>
               </a:solidFill>
             </c:spPr>
           </c:dPt>
@@ -163,7 +163,7 @@
             <c:idx val="2"/>
             <c:spPr>
               <a:solidFill>
-                <a:srgbClr val="0E9F6E"/>
+                <a:srgbClr val="7D8790"/>
               </a:solidFill>
             </c:spPr>
           </c:dPt>
@@ -232,16 +232,16 @@
                   <c:v>Hospitality payroll</c:v>
                 </c:pt>
                 <c:pt idx="1">
+                  <c:v>Excel for managers</c:v>
+                </c:pt>
+                <c:pt idx="2">
                   <c:v>Logistics systems rollout</c:v>
                 </c:pt>
-                <c:pt idx="2">
+                <c:pt idx="3">
                   <c:v>Manufacturer process mapping</c:v>
                 </c:pt>
-                <c:pt idx="3">
+                <c:pt idx="4">
                   <c:v>Dental group reporting</c:v>
-                </c:pt>
-                <c:pt idx="4">
-                  <c:v>Excel for managers</c:v>
                 </c:pt>
                 <c:pt idx="5">
                   <c:v>Construction firm finance</c:v>
@@ -268,19 +268,19 @@
                 <c:formatCode>0.0"%";[Red](0.0"%")</c:formatCode>
                 <c:ptCount val="10"/>
                 <c:pt idx="0">
-                  <c:v>48.6</c:v>
+                  <c:v>25.7</c:v>
                 </c:pt>
                 <c:pt idx="1">
-                  <c:v>52.7</c:v>
+                  <c:v>27.7</c:v>
                 </c:pt>
                 <c:pt idx="2">
+                  <c:v>35.2</c:v>
+                </c:pt>
+                <c:pt idx="3">
                   <c:v>53.9</c:v>
                 </c:pt>
-                <c:pt idx="3">
+                <c:pt idx="4">
                   <c:v>61.2</c:v>
-                </c:pt>
-                <c:pt idx="4">
-                  <c:v>62.5</c:v>
                 </c:pt>
                 <c:pt idx="5">
                   <c:v>63.4</c:v>
@@ -415,7 +415,7 @@
             <c:idx val="0"/>
             <c:spPr>
               <a:solidFill>
-                <a:srgbClr val="0E9F6E"/>
+                <a:srgbClr val="7D8790"/>
               </a:solidFill>
             </c:spPr>
           </c:dPt>
@@ -423,7 +423,7 @@
             <c:idx val="1"/>
             <c:spPr>
               <a:solidFill>
-                <a:srgbClr val="0E9F6E"/>
+                <a:srgbClr val="7D8790"/>
               </a:solidFill>
             </c:spPr>
           </c:dPt>
@@ -431,7 +431,7 @@
             <c:idx val="2"/>
             <c:spPr>
               <a:solidFill>
-                <a:srgbClr val="0E9F6E"/>
+                <a:srgbClr val="7D8790"/>
               </a:solidFill>
             </c:spPr>
           </c:dPt>
@@ -500,16 +500,16 @@
                   <c:v>Hospitality payroll</c:v>
                 </c:pt>
                 <c:pt idx="1">
+                  <c:v>Excel for managers</c:v>
+                </c:pt>
+                <c:pt idx="2">
                   <c:v>Logistics systems rollout</c:v>
                 </c:pt>
-                <c:pt idx="2">
+                <c:pt idx="3">
                   <c:v>Manufacturer process mapping</c:v>
                 </c:pt>
-                <c:pt idx="3">
+                <c:pt idx="4">
                   <c:v>Dental group reporting</c:v>
-                </c:pt>
-                <c:pt idx="4">
-                  <c:v>Excel for managers</c:v>
                 </c:pt>
                 <c:pt idx="5">
                   <c:v>Construction firm finance</c:v>
@@ -536,19 +536,19 @@
                 <c:formatCode>$#,##0;[Red]($#,##0);"-"</c:formatCode>
                 <c:ptCount val="10"/>
                 <c:pt idx="0">
-                  <c:v>2040</c:v>
+                  <c:v>1080</c:v>
                 </c:pt>
                 <c:pt idx="1">
-                  <c:v>19350</c:v>
+                  <c:v>2440</c:v>
                 </c:pt>
                 <c:pt idx="2">
+                  <c:v>12950</c:v>
+                </c:pt>
+                <c:pt idx="3">
                   <c:v>11000</c:v>
                 </c:pt>
-                <c:pt idx="3">
+                <c:pt idx="4">
                   <c:v>4160</c:v>
-                </c:pt>
-                <c:pt idx="4">
-                  <c:v>5500</c:v>
                 </c:pt>
                 <c:pt idx="5">
                   <c:v>6020</c:v>
@@ -5184,7 +5184,7 @@
                           </a:solidFill>
                           <a:latin typeface="Roboto"/>
                         </a:rPr>
-                        <a:t>8,500</a:t>
+                        <a:t>17,600</a:t>
                       </a:r>
                     </a:p>
                   </a:txBody>
@@ -5238,7 +5238,7 @@
                           </a:solidFill>
                           <a:latin typeface="Roboto"/>
                         </a:rPr>
-                        <a:t>1,600</a:t>
+                        <a:t>10,700</a:t>
                       </a:r>
                     </a:p>
                   </a:txBody>
@@ -5404,7 +5404,7 @@
                           </a:solidFill>
                           <a:latin typeface="Roboto"/>
                         </a:rPr>
-                        <a:t>56,576</a:t>
+                        <a:t>54,301</a:t>
                       </a:r>
                     </a:p>
                   </a:txBody>
@@ -5458,7 +5458,7 @@
                           </a:solidFill>
                           <a:latin typeface="Roboto"/>
                         </a:rPr>
-                        <a:t>6,178</a:t>
+                        <a:t>3,903</a:t>
                       </a:r>
                     </a:p>
                   </a:txBody>
@@ -5514,7 +5514,7 @@
                           </a:solidFill>
                           <a:latin typeface="Roboto"/>
                         </a:rPr>
-                        <a:t>187,376</a:t>
+                        <a:t>194,201</a:t>
                       </a:r>
                     </a:p>
                   </a:txBody>
@@ -5568,7 +5568,7 @@
                           </a:solidFill>
                           <a:latin typeface="Roboto"/>
                         </a:rPr>
-                        <a:t>8,378</a:t>
+                        <a:t>15,203</a:t>
                       </a:r>
                     </a:p>
                   </a:txBody>
@@ -5734,7 +5734,7 @@
                           </a:solidFill>
                           <a:latin typeface="Roboto"/>
                         </a:rPr>
-                        <a:t>201,976</a:t>
+                        <a:t>208,801</a:t>
                       </a:r>
                     </a:p>
                   </a:txBody>
@@ -5788,7 +5788,7 @@
                           </a:solidFill>
                           <a:latin typeface="Roboto"/>
                         </a:rPr>
-                        <a:t>6,678</a:t>
+                        <a:t>13,503</a:t>
                       </a:r>
                     </a:p>
                   </a:txBody>
@@ -5844,7 +5844,7 @@
                           </a:solidFill>
                           <a:latin typeface="Roboto"/>
                         </a:rPr>
-                        <a:t>238,574</a:t>
+                        <a:t>231,749</a:t>
                       </a:r>
                     </a:p>
                   </a:txBody>
@@ -5898,7 +5898,7 @@
                           </a:solidFill>
                           <a:latin typeface="Roboto"/>
                         </a:rPr>
-                        <a:t>18,532</a:t>
+                        <a:t>11,707</a:t>
                       </a:r>
                     </a:p>
                   </a:txBody>
@@ -6462,7 +6462,7 @@
                           </a:solidFill>
                           <a:latin typeface="Roboto"/>
                         </a:rPr>
-                        <a:t>218,574</a:t>
+                        <a:t>211,749</a:t>
                       </a:r>
                     </a:p>
                   </a:txBody>
@@ -6516,7 +6516,7 @@
                           </a:solidFill>
                           <a:latin typeface="Roboto"/>
                         </a:rPr>
-                        <a:t>18,532</a:t>
+                        <a:t>11,707</a:t>
                       </a:r>
                     </a:p>
                   </a:txBody>
@@ -6572,7 +6572,7 @@
                           </a:solidFill>
                           <a:latin typeface="Roboto"/>
                         </a:rPr>
-                        <a:t>238,574</a:t>
+                        <a:t>231,749</a:t>
                       </a:r>
                     </a:p>
                   </a:txBody>
@@ -6626,7 +6626,7 @@
                           </a:solidFill>
                           <a:latin typeface="Roboto"/>
                         </a:rPr>
-                        <a:t>18,532</a:t>
+                        <a:t>11,707</a:t>
                       </a:r>
                     </a:p>
                   </a:txBody>
@@ -9701,7 +9701,7 @@
                           </a:solidFill>
                           <a:latin typeface="Roboto"/>
                         </a:rPr>
-                        <a:t>30</a:t>
+                        <a:t>36</a:t>
                       </a:r>
                     </a:p>
                   </a:txBody>
@@ -9782,7 +9782,7 @@
                           </a:solidFill>
                           <a:latin typeface="Roboto"/>
                         </a:rPr>
-                        <a:t>1,500</a:t>
+                        <a:t>4,200</a:t>
                       </a:r>
                     </a:p>
                   </a:txBody>
@@ -9809,7 +9809,7 @@
                           </a:solidFill>
                           <a:latin typeface="Roboto"/>
                         </a:rPr>
-                        <a:t>5,500</a:t>
+                        <a:t>2,440</a:t>
                       </a:r>
                     </a:p>
                   </a:txBody>
@@ -9836,7 +9836,7 @@
                           </a:solidFill>
                           <a:latin typeface="Roboto"/>
                         </a:rPr>
-                        <a:t>62.5</a:t>
+                        <a:t>27.7</a:t>
                       </a:r>
                     </a:p>
                   </a:txBody>
@@ -10137,7 +10137,7 @@
                           </a:solidFill>
                           <a:latin typeface="Roboto"/>
                         </a:rPr>
-                        <a:t>36</a:t>
+                        <a:t>52</a:t>
                       </a:r>
                     </a:p>
                   </a:txBody>
@@ -10245,7 +10245,7 @@
                           </a:solidFill>
                           <a:latin typeface="Roboto"/>
                         </a:rPr>
-                        <a:t>2,040</a:t>
+                        <a:t>1,080</a:t>
                       </a:r>
                     </a:p>
                   </a:txBody>
@@ -10272,7 +10272,7 @@
                           </a:solidFill>
                           <a:latin typeface="Roboto"/>
                         </a:rPr>
-                        <a:t>48.6</a:t>
+                        <a:t>25.7</a:t>
                       </a:r>
                     </a:p>
                   </a:txBody>
@@ -10436,7 +10436,7 @@
                           </a:solidFill>
                           <a:latin typeface="Roboto"/>
                         </a:rPr>
-                        <a:t>4,800</a:t>
+                        <a:t>11,200</a:t>
                       </a:r>
                     </a:p>
                   </a:txBody>
@@ -10463,7 +10463,7 @@
                           </a:solidFill>
                           <a:latin typeface="Roboto"/>
                         </a:rPr>
-                        <a:t>19,350</a:t>
+                        <a:t>12,950</a:t>
                       </a:r>
                     </a:p>
                   </a:txBody>
@@ -10490,7 +10490,7 @@
                           </a:solidFill>
                           <a:latin typeface="Roboto"/>
                         </a:rPr>
-                        <a:t>52.7</a:t>
+                        <a:t>35.2</a:t>
                       </a:r>
                     </a:p>
                   </a:txBody>
@@ -12649,7 +12649,7 @@
                 </a:solidFill>
                 <a:latin typeface="Roboto"/>
               </a:rPr>
-              <a:t>74.0%</a:t>
+              <a:t>76.2%</a:t>
             </a:r>
           </a:p>
         </p:txBody>
@@ -12688,7 +12688,7 @@
                 </a:solidFill>
                 <a:latin typeface="Roboto"/>
               </a:rPr>
-              <a:t>▲ from 71.1% in Aug</a:t>
+              <a:t>▲ from 72.6% in Aug</a:t>
             </a:r>
           </a:p>
         </p:txBody>
@@ -12815,7 +12815,7 @@
                 </a:solidFill>
                 <a:latin typeface="Roboto"/>
               </a:rPr>
-              <a:t>$178</a:t>
+              <a:t>$173</a:t>
             </a:r>
           </a:p>
         </p:txBody>
@@ -12854,7 +12854,7 @@
                 </a:solidFill>
                 <a:latin typeface="Roboto"/>
               </a:rPr>
-              <a:t>▲ from $177 in Aug</a:t>
+              <a:t>▼ from $173 in Aug</a:t>
             </a:r>
           </a:p>
         </p:txBody>
@@ -14139,7 +14139,7 @@
                           </a:solidFill>
                           <a:latin typeface="Roboto"/>
                         </a:rPr>
-                        <a:t>742.0 h</a:t>
+                        <a:t>764.0 h</a:t>
                       </a:r>
                     </a:p>
                   </a:txBody>
@@ -14166,7 +14166,7 @@
                           </a:solidFill>
                           <a:latin typeface="Roboto"/>
                         </a:rPr>
-                        <a:t>648.0 h</a:t>
+                        <a:t>662.0 h</a:t>
                       </a:r>
                     </a:p>
                   </a:txBody>
@@ -14554,7 +14554,7 @@
                           </a:solidFill>
                           <a:latin typeface="Roboto"/>
                         </a:rPr>
-                        <a:t>74.0%</a:t>
+                        <a:t>76.2%</a:t>
                       </a:r>
                     </a:p>
                   </a:txBody>
@@ -14581,7 +14581,7 @@
                           </a:solidFill>
                           <a:latin typeface="Roboto"/>
                         </a:rPr>
-                        <a:t>71.1%</a:t>
+                        <a:t>72.6%</a:t>
                       </a:r>
                     </a:p>
                   </a:txBody>
@@ -15120,7 +15120,7 @@
                           </a:solidFill>
                           <a:latin typeface="Roboto"/>
                         </a:rPr>
-                        <a:t>742.0 h</a:t>
+                        <a:t>764.0 h</a:t>
                       </a:r>
                     </a:p>
                   </a:txBody>
@@ -15147,7 +15147,7 @@
                           </a:solidFill>
                           <a:latin typeface="Roboto"/>
                         </a:rPr>
-                        <a:t>648.0 h</a:t>
+                        <a:t>662.0 h</a:t>
                       </a:r>
                     </a:p>
                   </a:txBody>
@@ -15203,7 +15203,7 @@
                           </a:solidFill>
                           <a:latin typeface="Roboto"/>
                         </a:rPr>
-                        <a:t>$178</a:t>
+                        <a:t>$173</a:t>
                       </a:r>
                     </a:p>
                   </a:txBody>
@@ -15230,7 +15230,7 @@
                           </a:solidFill>
                           <a:latin typeface="Roboto"/>
                         </a:rPr>
-                        <a:t>$177</a:t>
+                        <a:t>$173</a:t>
                       </a:r>
                     </a:p>
                   </a:txBody>
@@ -16883,7 +16883,7 @@
                           </a:solidFill>
                           <a:latin typeface="Roboto"/>
                         </a:rPr>
-                        <a:t>(8,500)</a:t>
+                        <a:t>(17,600)</a:t>
                       </a:r>
                     </a:p>
                   </a:txBody>
@@ -16937,7 +16937,7 @@
                           </a:solidFill>
                           <a:latin typeface="Roboto"/>
                         </a:rPr>
-                        <a:t>(1,600)</a:t>
+                        <a:t>(10,700)</a:t>
                       </a:r>
                     </a:p>
                   </a:txBody>
@@ -16993,7 +16993,7 @@
                           </a:solidFill>
                           <a:latin typeface="Roboto"/>
                         </a:rPr>
-                        <a:t>(55,000)</a:t>
+                        <a:t>(64,100)</a:t>
                       </a:r>
                     </a:p>
                   </a:txBody>
@@ -17047,7 +17047,7 @@
                           </a:solidFill>
                           <a:latin typeface="Roboto"/>
                         </a:rPr>
-                        <a:t>(1,600)</a:t>
+                        <a:t>(10,700)</a:t>
                       </a:r>
                     </a:p>
                   </a:txBody>
@@ -17103,7 +17103,7 @@
                           </a:solidFill>
                           <a:latin typeface="Roboto"/>
                         </a:rPr>
-                        <a:t>76,850</a:t>
+                        <a:t>67,750</a:t>
                       </a:r>
                     </a:p>
                   </a:txBody>
@@ -17157,7 +17157,7 @@
                           </a:solidFill>
                           <a:latin typeface="Roboto"/>
                         </a:rPr>
-                        <a:t>15,610</a:t>
+                        <a:t>6,510</a:t>
                       </a:r>
                     </a:p>
                   </a:txBody>
@@ -18491,7 +18491,7 @@
                           </a:solidFill>
                           <a:latin typeface="Roboto"/>
                         </a:rPr>
-                        <a:t>26,950</a:t>
+                        <a:t>17,850</a:t>
                       </a:r>
                     </a:p>
                   </a:txBody>
@@ -18545,7 +18545,7 @@
                           </a:solidFill>
                           <a:latin typeface="Roboto"/>
                         </a:rPr>
-                        <a:t>17,110</a:t>
+                        <a:t>8,010</a:t>
                       </a:r>
                     </a:p>
                   </a:txBody>
@@ -18821,7 +18821,7 @@
                           </a:solidFill>
                           <a:latin typeface="Roboto"/>
                         </a:rPr>
-                        <a:t>24,710</a:t>
+                        <a:t>15,610</a:t>
                       </a:r>
                     </a:p>
                   </a:txBody>
@@ -18875,7 +18875,7 @@
                           </a:solidFill>
                           <a:latin typeface="Roboto"/>
                         </a:rPr>
-                        <a:t>17,120</a:t>
+                        <a:t>8,020</a:t>
                       </a:r>
                     </a:p>
                   </a:txBody>
@@ -18931,7 +18931,7 @@
                           </a:solidFill>
                           <a:latin typeface="Roboto"/>
                         </a:rPr>
-                        <a:t>(6,178)</a:t>
+                        <a:t>(3,903)</a:t>
                       </a:r>
                     </a:p>
                   </a:txBody>
@@ -18985,7 +18985,7 @@
                           </a:solidFill>
                           <a:latin typeface="Roboto"/>
                         </a:rPr>
-                        <a:t>(4,280)</a:t>
+                        <a:t>(2,005)</a:t>
                       </a:r>
                     </a:p>
                   </a:txBody>
@@ -19041,7 +19041,7 @@
                           </a:solidFill>
                           <a:latin typeface="Roboto"/>
                         </a:rPr>
-                        <a:t>18,532</a:t>
+                        <a:t>11,707</a:t>
                       </a:r>
                     </a:p>
                   </a:txBody>
@@ -19095,7 +19095,7 @@
                           </a:solidFill>
                           <a:latin typeface="Roboto"/>
                         </a:rPr>
-                        <a:t>12,840</a:t>
+                        <a:t>6,015</a:t>
                       </a:r>
                     </a:p>
                   </a:txBody>

--- a/media/exports/services-sample-statements.pptx
+++ b/media/exports/services-sample-statements.pptx
@@ -5617,7 +5617,7 @@
                 </a:solidFill>
                 <a:latin typeface="Roboto"/>
               </a:rPr>
-              <a:t>Data retrieved 2pm, Tue 6 Oct 2026 · Generated 8 Oct 2026, 9:35am · Sample data · Made with Python (python-pptx)</a:t>
+              <a:t>Data retrieved 2pm, Tue 6 Oct 2026 · Generated 8 Oct 2026, 9:53am · Sample data · Made with Python (python-pptx)</a:t>
             </a:r>
           </a:p>
         </p:txBody>
@@ -7553,7 +7553,7 @@
                 </a:solidFill>
                 <a:latin typeface="Roboto"/>
               </a:rPr>
-              <a:t>Data retrieved 2pm, Tue 6 Oct 2026 · Generated 8 Oct 2026, 9:35am · Sample data · Made with Python (python-pptx)</a:t>
+              <a:t>Data retrieved 2pm, Tue 6 Oct 2026 · Generated 8 Oct 2026, 9:53am · Sample data · Made with Python (python-pptx)</a:t>
             </a:r>
           </a:p>
         </p:txBody>
@@ -8279,7 +8279,7 @@
                 </a:solidFill>
                 <a:latin typeface="Roboto"/>
               </a:rPr>
-              <a:t>Data retrieved 2pm, Tue 6 Oct 2026 · Generated 8 Oct 2026, 9:35am · Sample data · Made with Python (python-pptx)</a:t>
+              <a:t>Data retrieved 2pm, Tue 6 Oct 2026 · Generated 8 Oct 2026, 9:53am · Sample data · Made with Python (python-pptx)</a:t>
             </a:r>
           </a:p>
         </p:txBody>
@@ -10105,7 +10105,7 @@
                 </a:solidFill>
                 <a:latin typeface="Roboto"/>
               </a:rPr>
-              <a:t>Data retrieved 2pm, Tue 6 Oct 2026 · Generated 8 Oct 2026, 9:35am · Sample data · Made with Python (python-pptx)</a:t>
+              <a:t>Data retrieved 2pm, Tue 6 Oct 2026 · Generated 8 Oct 2026, 9:53am · Sample data · Made with Python (python-pptx)</a:t>
             </a:r>
           </a:p>
         </p:txBody>
@@ -12793,7 +12793,7 @@
                 </a:solidFill>
                 <a:latin typeface="Roboto"/>
               </a:rPr>
-              <a:t>Data retrieved 2pm, Tue 6 Oct 2026 · Generated 8 Oct 2026, 9:35am · Sample data · Made with Python (python-pptx)</a:t>
+              <a:t>Data retrieved 2pm, Tue 6 Oct 2026 · Generated 8 Oct 2026, 9:53am · Sample data · Made with Python (python-pptx)</a:t>
             </a:r>
           </a:p>
         </p:txBody>
@@ -13245,7 +13245,7 @@
                 </a:solidFill>
                 <a:latin typeface="Roboto"/>
               </a:rPr>
-              <a:t>Data retrieved 2pm, Tue 6 Oct 2026 · Generated 8 Oct 2026, 9:35am · Sample data · Made with Python (python-pptx)</a:t>
+              <a:t>Data retrieved 2pm, Tue 6 Oct 2026 · Generated 8 Oct 2026, 9:53am · Sample data · Made with Python (python-pptx)</a:t>
             </a:r>
           </a:p>
         </p:txBody>
@@ -13753,7 +13753,7 @@
                 </a:solidFill>
                 <a:latin typeface="Roboto"/>
               </a:rPr>
-              <a:t>Data retrieved 2pm, Tue 6 Oct 2026 · Generated 8 Oct 2026, 9:35am · Sample data · Made with Python (python-pptx)</a:t>
+              <a:t>Data retrieved 2pm, Tue 6 Oct 2026 · Generated 8 Oct 2026, 9:53am · Sample data · Made with Python (python-pptx)</a:t>
             </a:r>
           </a:p>
         </p:txBody>
@@ -14261,7 +14261,7 @@
                 </a:solidFill>
                 <a:latin typeface="Roboto"/>
               </a:rPr>
-              <a:t>Data retrieved 2pm, Tue 6 Oct 2026 · Generated 8 Oct 2026, 9:35am · Sample data · Made with Python (python-pptx)</a:t>
+              <a:t>Data retrieved 2pm, Tue 6 Oct 2026 · Generated 8 Oct 2026, 9:53am · Sample data · Made with Python (python-pptx)</a:t>
             </a:r>
           </a:p>
         </p:txBody>
@@ -14713,7 +14713,7 @@
                 </a:solidFill>
                 <a:latin typeface="Roboto"/>
               </a:rPr>
-              <a:t>Data retrieved 2pm, Tue 6 Oct 2026 · Generated 8 Oct 2026, 9:35am · Sample data · Made with Python (python-pptx)</a:t>
+              <a:t>Data retrieved 2pm, Tue 6 Oct 2026 · Generated 8 Oct 2026, 9:53am · Sample data · Made with Python (python-pptx)</a:t>
             </a:r>
           </a:p>
         </p:txBody>
@@ -15182,7 +15182,7 @@
             <a:r>
               <a:rPr sz="2600" b="1">
                 <a:solidFill>
-                  <a:srgbClr val="B42318"/>
+                  <a:srgbClr val="2F7A5D"/>
                 </a:solidFill>
                 <a:latin typeface="Roboto"/>
               </a:rPr>
@@ -15225,7 +15225,7 @@
                 </a:solidFill>
                 <a:latin typeface="Roboto"/>
               </a:rPr>
-              <a:t>▼ from $173 in Aug</a:t>
+              <a:t>■ same as Aug ($173)</a:t>
             </a:r>
           </a:p>
         </p:txBody>
@@ -15469,7 +15469,7 @@
                 </a:solidFill>
                 <a:latin typeface="Roboto"/>
               </a:rPr>
-              <a:t>Data retrieved 2pm, Tue 6 Oct 2026 · Generated 8 Oct 2026, 9:35am · Sample data · Made with Python (python-pptx)</a:t>
+              <a:t>Data retrieved 2pm, Tue 6 Oct 2026 · Generated 8 Oct 2026, 9:53am · Sample data · Made with Python (python-pptx)</a:t>
             </a:r>
           </a:p>
         </p:txBody>
@@ -15898,7 +15898,7 @@
                 </a:solidFill>
                 <a:latin typeface="Roboto"/>
               </a:rPr>
-              <a:t>Data retrieved 2pm, Tue 6 Oct 2026 · Generated 8 Oct 2026, 9:35am · Sample data · Made with Python (python-pptx)</a:t>
+              <a:t>Data retrieved 2pm, Tue 6 Oct 2026 · Generated 8 Oct 2026, 9:53am · Sample data · Made with Python (python-pptx)</a:t>
             </a:r>
           </a:p>
         </p:txBody>
@@ -16252,7 +16252,7 @@
                 </a:solidFill>
                 <a:latin typeface="Roboto"/>
               </a:rPr>
-              <a:t>Data retrieved 2pm, Tue 6 Oct 2026 · Generated 8 Oct 2026, 9:35am · Sample data · Made with Python (python-pptx)</a:t>
+              <a:t>Data retrieved 2pm, Tue 6 Oct 2026 · Generated 8 Oct 2026, 9:53am · Sample data · Made with Python (python-pptx)</a:t>
             </a:r>
           </a:p>
         </p:txBody>
@@ -17148,7 +17148,7 @@
                 </a:solidFill>
                 <a:latin typeface="Roboto"/>
               </a:rPr>
-              <a:t>Data retrieved 2pm, Tue 6 Oct 2026 · Generated 8 Oct 2026, 9:35am · Sample data · Made with Python (python-pptx)</a:t>
+              <a:t>Data retrieved 2pm, Tue 6 Oct 2026 · Generated 8 Oct 2026, 9:53am · Sample data · Made with Python (python-pptx)</a:t>
             </a:r>
           </a:p>
         </p:txBody>
@@ -17795,7 +17795,7 @@
                 </a:solidFill>
                 <a:latin typeface="Roboto"/>
               </a:rPr>
-              <a:t>Data retrieved 2pm, Tue 6 Oct 2026 · Generated 8 Oct 2026, 9:35am · Sample data · Made with Python (python-pptx)</a:t>
+              <a:t>Data retrieved 2pm, Tue 6 Oct 2026 · Generated 8 Oct 2026, 9:53am · Sample data · Made with Python (python-pptx)</a:t>
             </a:r>
           </a:p>
         </p:txBody>
@@ -18442,7 +18442,7 @@
                 </a:solidFill>
                 <a:latin typeface="Roboto"/>
               </a:rPr>
-              <a:t>Data retrieved 2pm, Tue 6 Oct 2026 · Generated 8 Oct 2026, 9:35am · Sample data · Made with Python (python-pptx)</a:t>
+              <a:t>Data retrieved 2pm, Tue 6 Oct 2026 · Generated 8 Oct 2026, 9:53am · Sample data · Made with Python (python-pptx)</a:t>
             </a:r>
           </a:p>
         </p:txBody>
@@ -20378,7 +20378,7 @@
                 </a:solidFill>
                 <a:latin typeface="Roboto"/>
               </a:rPr>
-              <a:t>Data retrieved 2pm, Tue 6 Oct 2026 · Generated 8 Oct 2026, 9:35am · Sample data · Made with Python (python-pptx)</a:t>
+              <a:t>Data retrieved 2pm, Tue 6 Oct 2026 · Generated 8 Oct 2026, 9:53am · Sample data · Made with Python (python-pptx)</a:t>
             </a:r>
           </a:p>
         </p:txBody>
@@ -21654,7 +21654,7 @@
                 </a:solidFill>
                 <a:latin typeface="Roboto"/>
               </a:rPr>
-              <a:t>Data retrieved 2pm, Tue 6 Oct 2026 · Generated 8 Oct 2026, 9:35am · Sample data · Made with Python (python-pptx)</a:t>
+              <a:t>Data retrieved 2pm, Tue 6 Oct 2026 · Generated 8 Oct 2026, 9:53am · Sample data · Made with Python (python-pptx)</a:t>
             </a:r>
           </a:p>
         </p:txBody>

--- a/media/exports/services-sample-statements.pptx
+++ b/media/exports/services-sample-statements.pptx
@@ -5617,7 +5617,7 @@
                 </a:solidFill>
                 <a:latin typeface="Roboto"/>
               </a:rPr>
-              <a:t>Data retrieved 2pm, Tue 6 Oct 2026 · Generated 8 Oct 2026, 9:53am · Sample data · Made with Python (python-pptx)</a:t>
+              <a:t>Data retrieved 2pm, Tue 6 Oct 2026 · Generated 8 Oct 2026, 9:30pm · Sample data · Made with Python (python-pptx)</a:t>
             </a:r>
           </a:p>
         </p:txBody>
@@ -7553,7 +7553,7 @@
                 </a:solidFill>
                 <a:latin typeface="Roboto"/>
               </a:rPr>
-              <a:t>Data retrieved 2pm, Tue 6 Oct 2026 · Generated 8 Oct 2026, 9:53am · Sample data · Made with Python (python-pptx)</a:t>
+              <a:t>Data retrieved 2pm, Tue 6 Oct 2026 · Generated 8 Oct 2026, 9:30pm · Sample data · Made with Python (python-pptx)</a:t>
             </a:r>
           </a:p>
         </p:txBody>
@@ -8279,7 +8279,7 @@
                 </a:solidFill>
                 <a:latin typeface="Roboto"/>
               </a:rPr>
-              <a:t>Data retrieved 2pm, Tue 6 Oct 2026 · Generated 8 Oct 2026, 9:53am · Sample data · Made with Python (python-pptx)</a:t>
+              <a:t>Data retrieved 2pm, Tue 6 Oct 2026 · Generated 8 Oct 2026, 9:30pm · Sample data · Made with Python (python-pptx)</a:t>
             </a:r>
           </a:p>
         </p:txBody>
@@ -10105,7 +10105,7 @@
                 </a:solidFill>
                 <a:latin typeface="Roboto"/>
               </a:rPr>
-              <a:t>Data retrieved 2pm, Tue 6 Oct 2026 · Generated 8 Oct 2026, 9:53am · Sample data · Made with Python (python-pptx)</a:t>
+              <a:t>Data retrieved 2pm, Tue 6 Oct 2026 · Generated 8 Oct 2026, 9:30pm · Sample data · Made with Python (python-pptx)</a:t>
             </a:r>
           </a:p>
         </p:txBody>
@@ -12793,7 +12793,7 @@
                 </a:solidFill>
                 <a:latin typeface="Roboto"/>
               </a:rPr>
-              <a:t>Data retrieved 2pm, Tue 6 Oct 2026 · Generated 8 Oct 2026, 9:53am · Sample data · Made with Python (python-pptx)</a:t>
+              <a:t>Data retrieved 2pm, Tue 6 Oct 2026 · Generated 8 Oct 2026, 9:30pm · Sample data · Made with Python (python-pptx)</a:t>
             </a:r>
           </a:p>
         </p:txBody>
@@ -13245,7 +13245,7 @@
                 </a:solidFill>
                 <a:latin typeface="Roboto"/>
               </a:rPr>
-              <a:t>Data retrieved 2pm, Tue 6 Oct 2026 · Generated 8 Oct 2026, 9:53am · Sample data · Made with Python (python-pptx)</a:t>
+              <a:t>Data retrieved 2pm, Tue 6 Oct 2026 · Generated 8 Oct 2026, 9:30pm · Sample data · Made with Python (python-pptx)</a:t>
             </a:r>
           </a:p>
         </p:txBody>
@@ -13665,7 +13665,7 @@
                           </a:solidFill>
                           <a:latin typeface="Roboto"/>
                         </a:rPr>
-                        <a:t>10 (every one is in the Excel download and CSV)</a:t>
+                        <a:t>10 (every one is in the spreadsheet download and CSV)</a:t>
                       </a:r>
                     </a:p>
                   </a:txBody>
@@ -13753,7 +13753,7 @@
                 </a:solidFill>
                 <a:latin typeface="Roboto"/>
               </a:rPr>
-              <a:t>Data retrieved 2pm, Tue 6 Oct 2026 · Generated 8 Oct 2026, 9:53am · Sample data · Made with Python (python-pptx)</a:t>
+              <a:t>Data retrieved 2pm, Tue 6 Oct 2026 · Generated 8 Oct 2026, 9:30pm · Sample data · Made with Python (python-pptx)</a:t>
             </a:r>
           </a:p>
         </p:txBody>
@@ -14261,7 +14261,7 @@
                 </a:solidFill>
                 <a:latin typeface="Roboto"/>
               </a:rPr>
-              <a:t>Data retrieved 2pm, Tue 6 Oct 2026 · Generated 8 Oct 2026, 9:53am · Sample data · Made with Python (python-pptx)</a:t>
+              <a:t>Data retrieved 2pm, Tue 6 Oct 2026 · Generated 8 Oct 2026, 9:30pm · Sample data · Made with Python (python-pptx)</a:t>
             </a:r>
           </a:p>
         </p:txBody>
@@ -14713,7 +14713,7 @@
                 </a:solidFill>
                 <a:latin typeface="Roboto"/>
               </a:rPr>
-              <a:t>Data retrieved 2pm, Tue 6 Oct 2026 · Generated 8 Oct 2026, 9:53am · Sample data · Made with Python (python-pptx)</a:t>
+              <a:t>Data retrieved 2pm, Tue 6 Oct 2026 · Generated 8 Oct 2026, 9:30pm · Sample data · Made with Python (python-pptx)</a:t>
             </a:r>
           </a:p>
         </p:txBody>
@@ -15469,7 +15469,7 @@
                 </a:solidFill>
                 <a:latin typeface="Roboto"/>
               </a:rPr>
-              <a:t>Data retrieved 2pm, Tue 6 Oct 2026 · Generated 8 Oct 2026, 9:53am · Sample data · Made with Python (python-pptx)</a:t>
+              <a:t>Data retrieved 2pm, Tue 6 Oct 2026 · Generated 8 Oct 2026, 9:30pm · Sample data · Made with Python (python-pptx)</a:t>
             </a:r>
           </a:p>
         </p:txBody>
@@ -15898,7 +15898,7 @@
                 </a:solidFill>
                 <a:latin typeface="Roboto"/>
               </a:rPr>
-              <a:t>Data retrieved 2pm, Tue 6 Oct 2026 · Generated 8 Oct 2026, 9:53am · Sample data · Made with Python (python-pptx)</a:t>
+              <a:t>Data retrieved 2pm, Tue 6 Oct 2026 · Generated 8 Oct 2026, 9:30pm · Sample data · Made with Python (python-pptx)</a:t>
             </a:r>
           </a:p>
         </p:txBody>
@@ -16252,7 +16252,7 @@
                 </a:solidFill>
                 <a:latin typeface="Roboto"/>
               </a:rPr>
-              <a:t>Data retrieved 2pm, Tue 6 Oct 2026 · Generated 8 Oct 2026, 9:53am · Sample data · Made with Python (python-pptx)</a:t>
+              <a:t>Data retrieved 2pm, Tue 6 Oct 2026 · Generated 8 Oct 2026, 9:30pm · Sample data · Made with Python (python-pptx)</a:t>
             </a:r>
           </a:p>
         </p:txBody>
@@ -17148,7 +17148,7 @@
                 </a:solidFill>
                 <a:latin typeface="Roboto"/>
               </a:rPr>
-              <a:t>Data retrieved 2pm, Tue 6 Oct 2026 · Generated 8 Oct 2026, 9:53am · Sample data · Made with Python (python-pptx)</a:t>
+              <a:t>Data retrieved 2pm, Tue 6 Oct 2026 · Generated 8 Oct 2026, 9:30pm · Sample data · Made with Python (python-pptx)</a:t>
             </a:r>
           </a:p>
         </p:txBody>
@@ -17795,7 +17795,7 @@
                 </a:solidFill>
                 <a:latin typeface="Roboto"/>
               </a:rPr>
-              <a:t>Data retrieved 2pm, Tue 6 Oct 2026 · Generated 8 Oct 2026, 9:53am · Sample data · Made with Python (python-pptx)</a:t>
+              <a:t>Data retrieved 2pm, Tue 6 Oct 2026 · Generated 8 Oct 2026, 9:30pm · Sample data · Made with Python (python-pptx)</a:t>
             </a:r>
           </a:p>
         </p:txBody>
@@ -18442,7 +18442,7 @@
                 </a:solidFill>
                 <a:latin typeface="Roboto"/>
               </a:rPr>
-              <a:t>Data retrieved 2pm, Tue 6 Oct 2026 · Generated 8 Oct 2026, 9:53am · Sample data · Made with Python (python-pptx)</a:t>
+              <a:t>Data retrieved 2pm, Tue 6 Oct 2026 · Generated 8 Oct 2026, 9:30pm · Sample data · Made with Python (python-pptx)</a:t>
             </a:r>
           </a:p>
         </p:txBody>
@@ -20378,7 +20378,7 @@
                 </a:solidFill>
                 <a:latin typeface="Roboto"/>
               </a:rPr>
-              <a:t>Data retrieved 2pm, Tue 6 Oct 2026 · Generated 8 Oct 2026, 9:53am · Sample data · Made with Python (python-pptx)</a:t>
+              <a:t>Data retrieved 2pm, Tue 6 Oct 2026 · Generated 8 Oct 2026, 9:30pm · Sample data · Made with Python (python-pptx)</a:t>
             </a:r>
           </a:p>
         </p:txBody>
@@ -21654,7 +21654,7 @@
                 </a:solidFill>
                 <a:latin typeface="Roboto"/>
               </a:rPr>
-              <a:t>Data retrieved 2pm, Tue 6 Oct 2026 · Generated 8 Oct 2026, 9:53am · Sample data · Made with Python (python-pptx)</a:t>
+              <a:t>Data retrieved 2pm, Tue 6 Oct 2026 · Generated 8 Oct 2026, 9:30pm · Sample data · Made with Python (python-pptx)</a:t>
             </a:r>
           </a:p>
         </p:txBody>

--- a/media/exports/services-sample-statements.pptx
+++ b/media/exports/services-sample-statements.pptx
@@ -22,6 +22,7 @@
     <p:sldId id="270" r:id="rId22"/>
     <p:sldId id="271" r:id="rId23"/>
     <p:sldId id="272" r:id="rId24"/>
+    <p:sldId id="273" r:id="rId25"/>
   </p:sldIdLst>
   <p:sldSz cx="12191695" cy="6858000" type="screen4x3"/>
   <p:notesSz cx="6858000" cy="9144000"/>
@@ -177,7 +178,7 @@
             <c:idx val="2"/>
             <c:spPr>
               <a:solidFill>
-                <a:srgbClr val="7D8790"/>
+                <a:srgbClr val="0E9F6E"/>
               </a:solidFill>
             </c:spPr>
           </c:dPt>
@@ -282,34 +283,34 @@
                 <c:formatCode>0.0"%";[Red](0.0"%")</c:formatCode>
                 <c:ptCount val="10"/>
                 <c:pt idx="0">
-                  <c:v>25.7</c:v>
+                  <c:v>32.2</c:v>
                 </c:pt>
                 <c:pt idx="1">
-                  <c:v>27.7</c:v>
+                  <c:v>34.4</c:v>
                 </c:pt>
                 <c:pt idx="2">
-                  <c:v>35.2</c:v>
+                  <c:v>41.9</c:v>
                 </c:pt>
                 <c:pt idx="3">
-                  <c:v>53.9</c:v>
+                  <c:v>57.7</c:v>
                 </c:pt>
                 <c:pt idx="4">
-                  <c:v>61.2</c:v>
+                  <c:v>64.8</c:v>
                 </c:pt>
                 <c:pt idx="5">
-                  <c:v>63.4</c:v>
+                  <c:v>66.5</c:v>
                 </c:pt>
                 <c:pt idx="6">
-                  <c:v>63.6</c:v>
+                  <c:v>66.7</c:v>
                 </c:pt>
                 <c:pt idx="7">
-                  <c:v>65.0</c:v>
+                  <c:v>68.2</c:v>
                 </c:pt>
                 <c:pt idx="8">
-                  <c:v>68.4</c:v>
+                  <c:v>71.4</c:v>
                 </c:pt>
                 <c:pt idx="9">
-                  <c:v>81.7</c:v>
+                  <c:v>83.5</c:v>
                 </c:pt>
               </c:numCache>
             </c:numRef>
@@ -373,7 +374,7 @@
       <c:valAx>
         <c:axId val="-2113994440"/>
         <c:scaling>
-          <c:max val="93.955"/>
+          <c:max val="96.02499999999999"/>
           <c:min val="0.0"/>
         </c:scaling>
         <c:delete/>
@@ -459,7 +460,7 @@
             <c:idx val="2"/>
             <c:spPr>
               <a:solidFill>
-                <a:srgbClr val="7D8790"/>
+                <a:srgbClr val="0E9F6E"/>
               </a:solidFill>
             </c:spPr>
           </c:dPt>
@@ -564,34 +565,34 @@
                 <c:formatCode>$#,##0;[Red]($#,##0);"-"</c:formatCode>
                 <c:ptCount val="10"/>
                 <c:pt idx="0">
-                  <c:v>1080</c:v>
+                  <c:v>1480</c:v>
                 </c:pt>
                 <c:pt idx="1">
-                  <c:v>2440</c:v>
+                  <c:v>3340</c:v>
                 </c:pt>
                 <c:pt idx="2">
-                  <c:v>12950</c:v>
+                  <c:v>17150</c:v>
                 </c:pt>
                 <c:pt idx="3">
-                  <c:v>11000</c:v>
+                  <c:v>12800</c:v>
                 </c:pt>
                 <c:pt idx="4">
-                  <c:v>4160</c:v>
+                  <c:v>4860</c:v>
                 </c:pt>
                 <c:pt idx="5">
-                  <c:v>6020</c:v>
+                  <c:v>6920</c:v>
                 </c:pt>
                 <c:pt idx="6">
-                  <c:v>6720</c:v>
+                  <c:v>7680</c:v>
                 </c:pt>
                 <c:pt idx="7">
-                  <c:v>7800</c:v>
+                  <c:v>9000</c:v>
                 </c:pt>
                 <c:pt idx="8">
-                  <c:v>12480</c:v>
+                  <c:v>14400</c:v>
                 </c:pt>
                 <c:pt idx="9">
-                  <c:v>3760</c:v>
+                  <c:v>4260</c:v>
                 </c:pt>
               </c:numCache>
             </c:numRef>
@@ -655,7 +656,7 @@
       <c:valAx>
         <c:axId val="-2113994440"/>
         <c:scaling>
-          <c:max val="14892.499999999998"/>
+          <c:max val="19722.5"/>
           <c:min val="0.0"/>
         </c:scaling>
         <c:delete/>
@@ -1667,6 +1668,76 @@
 </p:notes>
 </file>
 
+<file path=ppt/notesSlides/notesSlide18.xml><?xml version="1.0" encoding="utf-8"?>
+<p:notes xmlns:a="http://schemas.openxmlformats.org/drawingml/2006/main" xmlns:p="http://schemas.openxmlformats.org/presentationml/2006/main" xmlns:r="http://schemas.openxmlformats.org/officeDocument/2006/relationships">
+  <p:cSld>
+    <p:spTree>
+      <p:nvGrpSpPr>
+        <p:cNvPr id="1" name=""/>
+        <p:cNvGrpSpPr/>
+        <p:nvPr/>
+      </p:nvGrpSpPr>
+      <p:grpSpPr>
+        <a:xfrm>
+          <a:off x="0" y="0"/>
+          <a:ext cx="0" cy="0"/>
+          <a:chOff x="0" y="0"/>
+          <a:chExt cx="0" cy="0"/>
+        </a:xfrm>
+      </p:grpSpPr>
+      <p:sp>
+        <p:nvSpPr>
+          <p:cNvPr id="2" name="Slide Image Placeholder 1"/>
+          <p:cNvSpPr>
+            <a:spLocks noGrp="1"/>
+          </p:cNvSpPr>
+          <p:nvPr>
+            <p:ph type="sldImg" idx="2"/>
+          </p:nvPr>
+        </p:nvSpPr>
+        <p:spPr/>
+      </p:sp>
+      <p:sp>
+        <p:nvSpPr>
+          <p:cNvPr id="3" name="Notes Placeholder 2"/>
+          <p:cNvSpPr>
+            <a:spLocks noGrp="1"/>
+          </p:cNvSpPr>
+          <p:nvPr>
+            <p:ph type="body" idx="3" sz="quarter"/>
+          </p:nvPr>
+        </p:nvSpPr>
+        <p:spPr/>
+        <p:txBody>
+          <a:bodyPr/>
+          <a:lstStyle/>
+          <a:p>
+            <a:r>
+              <a:t>Assumptions: GST, BAS and payroll</a:t>
+            </a:r>
+          </a:p>
+        </p:txBody>
+      </p:sp>
+      <p:sp>
+        <p:nvSpPr>
+          <p:cNvPr id="4" name="Slide Number Placeholder 3"/>
+          <p:cNvSpPr>
+            <a:spLocks noGrp="1"/>
+          </p:cNvSpPr>
+          <p:nvPr>
+            <p:ph type="sldNum" idx="5" sz="quarter"/>
+          </p:nvPr>
+        </p:nvSpPr>
+        <p:spPr/>
+      </p:sp>
+    </p:spTree>
+  </p:cSld>
+  <p:clrMapOvr>
+    <a:masterClrMapping/>
+  </p:clrMapOvr>
+</p:notes>
+</file>
+
 <file path=ppt/notesSlides/notesSlide2.xml><?xml version="1.0" encoding="utf-8"?>
 <p:notes xmlns:a="http://schemas.openxmlformats.org/drawingml/2006/main" xmlns:p="http://schemas.openxmlformats.org/presentationml/2006/main" xmlns:r="http://schemas.openxmlformats.org/officeDocument/2006/relationships">
   <p:cSld>
@@ -1712,7 +1783,7 @@
           <a:lstStyle/>
           <a:p>
             <a:r>
-              <a:t>The fourth sheet: September 2026 vs August 2026: Consultant utilisation, September 76.2%; Revenue per billable hour $173; Unbilled work + unpaid invoices $216,090.</a:t>
+              <a:t>The fourth sheet: September 2026 vs August 2026: Consultant utilisation, September 76.2%; Revenue per billable hour $190; Unbilled work + unpaid invoices $251,402.</a:t>
             </a:r>
           </a:p>
         </p:txBody>
@@ -5617,7 +5688,7 @@
                 </a:solidFill>
                 <a:latin typeface="Roboto"/>
               </a:rPr>
-              <a:t>Data retrieved 2pm, Tue 6 Oct 2026 · Generated 8 Oct 2026, 9:30pm · Sample data · Made with Python (python-pptx)</a:t>
+              <a:t>Data retrieved 2pm, Tue 6 Oct 2026 · Generated 9 Oct 2026, 8:45am · Sample data · Made with Python (python-pptx)</a:t>
             </a:r>
           </a:p>
         </p:txBody>
@@ -5656,7 +5727,7 @@
                 </a:solidFill>
                 <a:latin typeface="Roboto"/>
               </a:rPr>
-              <a:t>Slide 1 of 17</a:t>
+              <a:t>Slide 1 of 18</a:t>
             </a:r>
           </a:p>
         </p:txBody>
@@ -5981,7 +6052,7 @@
                           </a:solidFill>
                           <a:latin typeface="Roboto"/>
                         </a:rPr>
-                        <a:t>149,260</a:t>
+                        <a:t>207,781</a:t>
                       </a:r>
                     </a:p>
                   </a:txBody>
@@ -6008,7 +6079,7 @@
                           </a:solidFill>
                           <a:latin typeface="Roboto"/>
                         </a:rPr>
-                        <a:t>192,150</a:t>
+                        <a:t>229,278</a:t>
                       </a:r>
                     </a:p>
                   </a:txBody>
@@ -6035,7 +6106,7 @@
                           </a:solidFill>
                           <a:latin typeface="Roboto"/>
                         </a:rPr>
-                        <a:t>(42,890)</a:t>
+                        <a:t>(21,497)</a:t>
                       </a:r>
                     </a:p>
                   </a:txBody>
@@ -6091,7 +6162,7 @@
                           </a:solidFill>
                           <a:latin typeface="Roboto"/>
                         </a:rPr>
-                        <a:t>116,800</a:t>
+                        <a:t>141,592</a:t>
                       </a:r>
                     </a:p>
                   </a:txBody>
@@ -6118,7 +6189,7 @@
                           </a:solidFill>
                           <a:latin typeface="Roboto"/>
                         </a:rPr>
-                        <a:t>71,290</a:t>
+                        <a:t>86,405</a:t>
                       </a:r>
                     </a:p>
                   </a:txBody>
@@ -6145,7 +6216,7 @@
                           </a:solidFill>
                           <a:latin typeface="Roboto"/>
                         </a:rPr>
-                        <a:t>45,510</a:t>
+                        <a:t>55,187</a:t>
                       </a:r>
                     </a:p>
                   </a:txBody>
@@ -6201,7 +6272,7 @@
                           </a:solidFill>
                           <a:latin typeface="Roboto"/>
                         </a:rPr>
-                        <a:t>99,290</a:t>
+                        <a:t>109,810</a:t>
                       </a:r>
                     </a:p>
                   </a:txBody>
@@ -6228,7 +6299,7 @@
                           </a:solidFill>
                           <a:latin typeface="Roboto"/>
                         </a:rPr>
-                        <a:t>77,900</a:t>
+                        <a:t>86,000</a:t>
                       </a:r>
                     </a:p>
                   </a:txBody>
@@ -6255,7 +6326,7 @@
                           </a:solidFill>
                           <a:latin typeface="Roboto"/>
                         </a:rPr>
-                        <a:t>21,390</a:t>
+                        <a:t>23,810</a:t>
                       </a:r>
                     </a:p>
                   </a:txBody>
@@ -6421,7 +6492,7 @@
                           </a:solidFill>
                           <a:latin typeface="Roboto"/>
                         </a:rPr>
-                        <a:t>380,350</a:t>
+                        <a:t>474,183</a:t>
                       </a:r>
                     </a:p>
                   </a:txBody>
@@ -6448,7 +6519,7 @@
                           </a:solidFill>
                           <a:latin typeface="Roboto"/>
                         </a:rPr>
-                        <a:t>356,340</a:t>
+                        <a:t>416,683</a:t>
                       </a:r>
                     </a:p>
                   </a:txBody>
@@ -6475,7 +6546,7 @@
                           </a:solidFill>
                           <a:latin typeface="Roboto"/>
                         </a:rPr>
-                        <a:t>24,010</a:t>
+                        <a:t>57,500</a:t>
                       </a:r>
                     </a:p>
                   </a:txBody>
@@ -6641,7 +6712,7 @@
                           </a:solidFill>
                           <a:latin typeface="Roboto"/>
                         </a:rPr>
-                        <a:t>440,550</a:t>
+                        <a:t>534,383</a:t>
                       </a:r>
                     </a:p>
                   </a:txBody>
@@ -6668,7 +6739,7 @@
                           </a:solidFill>
                           <a:latin typeface="Roboto"/>
                         </a:rPr>
-                        <a:t>415,340</a:t>
+                        <a:t>475,683</a:t>
                       </a:r>
                     </a:p>
                   </a:txBody>
@@ -6695,7 +6766,7 @@
                           </a:solidFill>
                           <a:latin typeface="Roboto"/>
                         </a:rPr>
-                        <a:t>25,210</a:t>
+                        <a:t>58,700</a:t>
                       </a:r>
                     </a:p>
                   </a:txBody>
@@ -6751,7 +6822,7 @@
                           </a:solidFill>
                           <a:latin typeface="Roboto"/>
                         </a:rPr>
-                        <a:t>17,600</a:t>
+                        <a:t>19,360</a:t>
                       </a:r>
                     </a:p>
                   </a:txBody>
@@ -6778,7 +6849,7 @@
                           </a:solidFill>
                           <a:latin typeface="Roboto"/>
                         </a:rPr>
-                        <a:t>6,900</a:t>
+                        <a:t>7,590</a:t>
                       </a:r>
                     </a:p>
                   </a:txBody>
@@ -6805,7 +6876,7 @@
                           </a:solidFill>
                           <a:latin typeface="Roboto"/>
                         </a:rPr>
-                        <a:t>10,700</a:t>
+                        <a:t>11,770</a:t>
                       </a:r>
                     </a:p>
                   </a:txBody>
@@ -6834,7 +6905,7 @@
                           </a:solidFill>
                           <a:latin typeface="Roboto"/>
                         </a:rPr>
-                        <a:t>Employee leave provisions</a:t>
+                        <a:t>Wages owed (since the last pay run)</a:t>
                       </a:r>
                     </a:p>
                   </a:txBody>
@@ -6861,7 +6932,7 @@
                           </a:solidFill>
                           <a:latin typeface="Roboto"/>
                         </a:rPr>
-                        <a:t>122,300</a:t>
+                        <a:t>31,400</a:t>
                       </a:r>
                     </a:p>
                   </a:txBody>
@@ -6888,7 +6959,7 @@
                           </a:solidFill>
                           <a:latin typeface="Roboto"/>
                         </a:rPr>
-                        <a:t>121,700</a:t>
+                        <a:t>23,174</a:t>
                       </a:r>
                     </a:p>
                   </a:txBody>
@@ -6915,7 +6986,7 @@
                           </a:solidFill>
                           <a:latin typeface="Roboto"/>
                         </a:rPr>
-                        <a:t>600</a:t>
+                        <a:t>8,226</a:t>
                       </a:r>
                     </a:p>
                   </a:txBody>
@@ -6944,7 +7015,7 @@
                           </a:solidFill>
                           <a:latin typeface="Roboto"/>
                         </a:rPr>
-                        <a:t>Income tax payable</a:t>
+                        <a:t>Super payable</a:t>
                       </a:r>
                     </a:p>
                   </a:txBody>
@@ -6971,7 +7042,7 @@
                           </a:solidFill>
                           <a:latin typeface="Roboto"/>
                         </a:rPr>
-                        <a:t>54,301</a:t>
+                        <a:t>3,766</a:t>
                       </a:r>
                     </a:p>
                   </a:txBody>
@@ -6998,7 +7069,7 @@
                           </a:solidFill>
                           <a:latin typeface="Roboto"/>
                         </a:rPr>
-                        <a:t>50,398</a:t>
+                        <a:t>2,780</a:t>
                       </a:r>
                     </a:p>
                   </a:txBody>
@@ -7025,7 +7096,7 @@
                           </a:solidFill>
                           <a:latin typeface="Roboto"/>
                         </a:rPr>
-                        <a:t>3,903</a:t>
+                        <a:t>986</a:t>
                       </a:r>
                     </a:p>
                   </a:txBody>
@@ -7048,13 +7119,13 @@
                         </a:defRPr>
                       </a:pPr>
                       <a:r>
-                        <a:rPr sz="1050" b="1">
-                          <a:solidFill>
-                            <a:srgbClr val="25342A"/>
-                          </a:solidFill>
-                          <a:latin typeface="Roboto"/>
-                        </a:rPr>
-                        <a:t>Total current liabilities</a:t>
+                        <a:rPr sz="1050">
+                          <a:solidFill>
+                            <a:srgbClr val="25342A"/>
+                          </a:solidFill>
+                          <a:latin typeface="Roboto"/>
+                        </a:rPr>
+                        <a:t>PAYG withholding payable</a:t>
                       </a:r>
                     </a:p>
                   </a:txBody>
@@ -7075,13 +7146,13 @@
                         </a:defRPr>
                       </a:pPr>
                       <a:r>
-                        <a:rPr sz="1050" b="1">
-                          <a:solidFill>
-                            <a:srgbClr val="25342A"/>
-                          </a:solidFill>
-                          <a:latin typeface="Roboto"/>
-                        </a:rPr>
-                        <a:t>194,201</a:t>
+                        <a:rPr sz="1050">
+                          <a:solidFill>
+                            <a:srgbClr val="25342A"/>
+                          </a:solidFill>
+                          <a:latin typeface="Roboto"/>
+                        </a:rPr>
+                        <a:t>47,814</a:t>
                       </a:r>
                     </a:p>
                   </a:txBody>
@@ -7102,13 +7173,13 @@
                         </a:defRPr>
                       </a:pPr>
                       <a:r>
-                        <a:rPr sz="1050" b="1">
-                          <a:solidFill>
-                            <a:srgbClr val="25342A"/>
-                          </a:solidFill>
-                          <a:latin typeface="Roboto"/>
-                        </a:rPr>
-                        <a:t>178,998</a:t>
+                        <a:rPr sz="1050">
+                          <a:solidFill>
+                            <a:srgbClr val="25342A"/>
+                          </a:solidFill>
+                          <a:latin typeface="Roboto"/>
+                        </a:rPr>
+                        <a:t>31,876</a:t>
                       </a:r>
                     </a:p>
                   </a:txBody>
@@ -7129,13 +7200,13 @@
                         </a:defRPr>
                       </a:pPr>
                       <a:r>
-                        <a:rPr sz="1050" b="1">
-                          <a:solidFill>
-                            <a:srgbClr val="25342A"/>
-                          </a:solidFill>
-                          <a:latin typeface="Roboto"/>
-                        </a:rPr>
-                        <a:t>15,203</a:t>
+                        <a:rPr sz="1050">
+                          <a:solidFill>
+                            <a:srgbClr val="25342A"/>
+                          </a:solidFill>
+                          <a:latin typeface="Roboto"/>
+                        </a:rPr>
+                        <a:t>15,938</a:t>
                       </a:r>
                     </a:p>
                   </a:txBody>
@@ -7164,7 +7235,7 @@
                           </a:solidFill>
                           <a:latin typeface="Roboto"/>
                         </a:rPr>
-                        <a:t>Equipment finance</a:t>
+                        <a:t>GST payable (net)</a:t>
                       </a:r>
                     </a:p>
                   </a:txBody>
@@ -7191,7 +7262,7 @@
                           </a:solidFill>
                           <a:latin typeface="Roboto"/>
                         </a:rPr>
-                        <a:t>14,600</a:t>
+                        <a:t>20,412</a:t>
                       </a:r>
                     </a:p>
                   </a:txBody>
@@ -7218,7 +7289,7 @@
                           </a:solidFill>
                           <a:latin typeface="Roboto"/>
                         </a:rPr>
-                        <a:t>16,300</a:t>
+                        <a:t>12,930</a:t>
                       </a:r>
                     </a:p>
                   </a:txBody>
@@ -7241,11 +7312,11 @@
                       <a:r>
                         <a:rPr sz="1050">
                           <a:solidFill>
-                            <a:srgbClr val="B42318"/>
-                          </a:solidFill>
-                          <a:latin typeface="Roboto"/>
-                        </a:rPr>
-                        <a:t>(1,700)</a:t>
+                            <a:srgbClr val="25342A"/>
+                          </a:solidFill>
+                          <a:latin typeface="Roboto"/>
+                        </a:rPr>
+                        <a:t>7,482</a:t>
                       </a:r>
                     </a:p>
                   </a:txBody>
@@ -7268,13 +7339,13 @@
                         </a:defRPr>
                       </a:pPr>
                       <a:r>
-                        <a:rPr sz="1050" b="1">
-                          <a:solidFill>
-                            <a:srgbClr val="25342A"/>
-                          </a:solidFill>
-                          <a:latin typeface="Roboto"/>
-                        </a:rPr>
-                        <a:t>Total liabilities</a:t>
+                        <a:rPr sz="1050">
+                          <a:solidFill>
+                            <a:srgbClr val="25342A"/>
+                          </a:solidFill>
+                          <a:latin typeface="Roboto"/>
+                        </a:rPr>
+                        <a:t>Employee leave provisions</a:t>
                       </a:r>
                     </a:p>
                   </a:txBody>
@@ -7295,13 +7366,13 @@
                         </a:defRPr>
                       </a:pPr>
                       <a:r>
-                        <a:rPr sz="1050" b="1">
-                          <a:solidFill>
-                            <a:srgbClr val="25342A"/>
-                          </a:solidFill>
-                          <a:latin typeface="Roboto"/>
-                        </a:rPr>
-                        <a:t>208,801</a:t>
+                        <a:rPr sz="1050">
+                          <a:solidFill>
+                            <a:srgbClr val="25342A"/>
+                          </a:solidFill>
+                          <a:latin typeface="Roboto"/>
+                        </a:rPr>
+                        <a:t>122,300</a:t>
                       </a:r>
                     </a:p>
                   </a:txBody>
@@ -7322,13 +7393,13 @@
                         </a:defRPr>
                       </a:pPr>
                       <a:r>
-                        <a:rPr sz="1050" b="1">
-                          <a:solidFill>
-                            <a:srgbClr val="25342A"/>
-                          </a:solidFill>
-                          <a:latin typeface="Roboto"/>
-                        </a:rPr>
-                        <a:t>195,298</a:t>
+                        <a:rPr sz="1050">
+                          <a:solidFill>
+                            <a:srgbClr val="25342A"/>
+                          </a:solidFill>
+                          <a:latin typeface="Roboto"/>
+                        </a:rPr>
+                        <a:t>121,700</a:t>
                       </a:r>
                     </a:p>
                   </a:txBody>
@@ -7349,13 +7420,13 @@
                         </a:defRPr>
                       </a:pPr>
                       <a:r>
-                        <a:rPr sz="1050" b="1">
-                          <a:solidFill>
-                            <a:srgbClr val="25342A"/>
-                          </a:solidFill>
-                          <a:latin typeface="Roboto"/>
-                        </a:rPr>
-                        <a:t>13,503</a:t>
+                        <a:rPr sz="1050">
+                          <a:solidFill>
+                            <a:srgbClr val="25342A"/>
+                          </a:solidFill>
+                          <a:latin typeface="Roboto"/>
+                        </a:rPr>
+                        <a:t>600</a:t>
                       </a:r>
                     </a:p>
                   </a:txBody>
@@ -7378,13 +7449,13 @@
                         </a:defRPr>
                       </a:pPr>
                       <a:r>
-                        <a:rPr sz="1050" b="1">
-                          <a:solidFill>
-                            <a:srgbClr val="25342A"/>
-                          </a:solidFill>
-                          <a:latin typeface="Roboto"/>
-                        </a:rPr>
-                        <a:t>Net assets</a:t>
+                        <a:rPr sz="1050">
+                          <a:solidFill>
+                            <a:srgbClr val="25342A"/>
+                          </a:solidFill>
+                          <a:latin typeface="Roboto"/>
+                        </a:rPr>
+                        <a:t>Income tax payable</a:t>
                       </a:r>
                     </a:p>
                   </a:txBody>
@@ -7405,13 +7476,13 @@
                         </a:defRPr>
                       </a:pPr>
                       <a:r>
-                        <a:rPr sz="1050" b="1">
-                          <a:solidFill>
-                            <a:srgbClr val="25342A"/>
-                          </a:solidFill>
-                          <a:latin typeface="Roboto"/>
-                        </a:rPr>
-                        <a:t>231,749</a:t>
+                        <a:rPr sz="1050">
+                          <a:solidFill>
+                            <a:srgbClr val="25342A"/>
+                          </a:solidFill>
+                          <a:latin typeface="Roboto"/>
+                        </a:rPr>
+                        <a:t>55,158</a:t>
                       </a:r>
                     </a:p>
                   </a:txBody>
@@ -7432,13 +7503,13 @@
                         </a:defRPr>
                       </a:pPr>
                       <a:r>
-                        <a:rPr sz="1050" b="1">
-                          <a:solidFill>
-                            <a:srgbClr val="25342A"/>
-                          </a:solidFill>
-                          <a:latin typeface="Roboto"/>
-                        </a:rPr>
-                        <a:t>220,042</a:t>
+                        <a:rPr sz="1050">
+                          <a:solidFill>
+                            <a:srgbClr val="25342A"/>
+                          </a:solidFill>
+                          <a:latin typeface="Roboto"/>
+                        </a:rPr>
+                        <a:t>51,308</a:t>
                       </a:r>
                     </a:p>
                   </a:txBody>
@@ -7459,13 +7530,13 @@
                         </a:defRPr>
                       </a:pPr>
                       <a:r>
-                        <a:rPr sz="1050" b="1">
-                          <a:solidFill>
-                            <a:srgbClr val="25342A"/>
-                          </a:solidFill>
-                          <a:latin typeface="Roboto"/>
-                        </a:rPr>
-                        <a:t>11,707</a:t>
+                        <a:rPr sz="1050">
+                          <a:solidFill>
+                            <a:srgbClr val="25342A"/>
+                          </a:solidFill>
+                          <a:latin typeface="Roboto"/>
+                        </a:rPr>
+                        <a:t>3,850</a:t>
                       </a:r>
                     </a:p>
                   </a:txBody>
@@ -7553,7 +7624,7 @@
                 </a:solidFill>
                 <a:latin typeface="Roboto"/>
               </a:rPr>
-              <a:t>Data retrieved 2pm, Tue 6 Oct 2026 · Generated 8 Oct 2026, 9:30pm · Sample data · Made with Python (python-pptx)</a:t>
+              <a:t>Data retrieved 2pm, Tue 6 Oct 2026 · Generated 9 Oct 2026, 8:45am · Sample data · Made with Python (python-pptx)</a:t>
             </a:r>
           </a:p>
         </p:txBody>
@@ -7592,7 +7663,7 @@
                 </a:solidFill>
                 <a:latin typeface="Roboto"/>
               </a:rPr>
-              <a:t>Slide 10 of 17</a:t>
+              <a:t>Slide 10 of 18</a:t>
             </a:r>
           </a:p>
         </p:txBody>
@@ -7748,7 +7819,7 @@
         </p:nvGraphicFramePr>
         <p:xfrm>
           <a:off x="457200" y="960120"/>
-          <a:ext cx="11277295" cy="1243584"/>
+          <a:ext cx="11277295" cy="2487168"/>
         </p:xfrm>
         <a:graphic>
           <a:graphicData uri="http://schemas.openxmlformats.org/drawingml/2006/table">
@@ -7884,13 +7955,13 @@
                         </a:defRPr>
                       </a:pPr>
                       <a:r>
-                        <a:rPr sz="1050">
-                          <a:solidFill>
-                            <a:srgbClr val="25342A"/>
-                          </a:solidFill>
-                          <a:latin typeface="Roboto"/>
-                        </a:rPr>
-                        <a:t>Share capital</a:t>
+                        <a:rPr sz="1050" b="1">
+                          <a:solidFill>
+                            <a:srgbClr val="25342A"/>
+                          </a:solidFill>
+                          <a:latin typeface="Roboto"/>
+                        </a:rPr>
+                        <a:t>Total current liabilities</a:t>
                       </a:r>
                     </a:p>
                   </a:txBody>
@@ -7911,13 +7982,13 @@
                         </a:defRPr>
                       </a:pPr>
                       <a:r>
-                        <a:rPr sz="1050">
-                          <a:solidFill>
-                            <a:srgbClr val="25342A"/>
-                          </a:solidFill>
-                          <a:latin typeface="Roboto"/>
-                        </a:rPr>
-                        <a:t>20,000</a:t>
+                        <a:rPr sz="1050" b="1">
+                          <a:solidFill>
+                            <a:srgbClr val="25342A"/>
+                          </a:solidFill>
+                          <a:latin typeface="Roboto"/>
+                        </a:rPr>
+                        <a:t>300,210</a:t>
                       </a:r>
                     </a:p>
                   </a:txBody>
@@ -7938,13 +8009,13 @@
                         </a:defRPr>
                       </a:pPr>
                       <a:r>
-                        <a:rPr sz="1050">
-                          <a:solidFill>
-                            <a:srgbClr val="25342A"/>
-                          </a:solidFill>
-                          <a:latin typeface="Roboto"/>
-                        </a:rPr>
-                        <a:t>20,000</a:t>
+                        <a:rPr sz="1050" b="1">
+                          <a:solidFill>
+                            <a:srgbClr val="25342A"/>
+                          </a:solidFill>
+                          <a:latin typeface="Roboto"/>
+                        </a:rPr>
+                        <a:t>251,358</a:t>
                       </a:r>
                     </a:p>
                   </a:txBody>
@@ -7965,13 +8036,13 @@
                         </a:defRPr>
                       </a:pPr>
                       <a:r>
-                        <a:rPr sz="1050">
-                          <a:solidFill>
-                            <a:srgbClr val="25342A"/>
-                          </a:solidFill>
-                          <a:latin typeface="Roboto"/>
-                        </a:rPr>
-                        <a:t>-</a:t>
+                        <a:rPr sz="1050" b="1">
+                          <a:solidFill>
+                            <a:srgbClr val="25342A"/>
+                          </a:solidFill>
+                          <a:latin typeface="Roboto"/>
+                        </a:rPr>
+                        <a:t>48,852</a:t>
                       </a:r>
                     </a:p>
                   </a:txBody>
@@ -8000,7 +8071,7 @@
                           </a:solidFill>
                           <a:latin typeface="Roboto"/>
                         </a:rPr>
-                        <a:t>Retained earnings</a:t>
+                        <a:t>Equipment finance</a:t>
                       </a:r>
                     </a:p>
                   </a:txBody>
@@ -8027,7 +8098,7 @@
                           </a:solidFill>
                           <a:latin typeface="Roboto"/>
                         </a:rPr>
-                        <a:t>211,749</a:t>
+                        <a:t>14,600</a:t>
                       </a:r>
                     </a:p>
                   </a:txBody>
@@ -8054,7 +8125,7 @@
                           </a:solidFill>
                           <a:latin typeface="Roboto"/>
                         </a:rPr>
-                        <a:t>200,042</a:t>
+                        <a:t>16,300</a:t>
                       </a:r>
                     </a:p>
                   </a:txBody>
@@ -8077,11 +8148,11 @@
                       <a:r>
                         <a:rPr sz="1050">
                           <a:solidFill>
-                            <a:srgbClr val="25342A"/>
-                          </a:solidFill>
-                          <a:latin typeface="Roboto"/>
-                        </a:rPr>
-                        <a:t>11,707</a:t>
+                            <a:srgbClr val="B42318"/>
+                          </a:solidFill>
+                          <a:latin typeface="Roboto"/>
+                        </a:rPr>
+                        <a:t>(1,700)</a:t>
                       </a:r>
                     </a:p>
                   </a:txBody>
@@ -8110,6 +8181,446 @@
                           </a:solidFill>
                           <a:latin typeface="Roboto"/>
                         </a:rPr>
+                        <a:t>Total liabilities</a:t>
+                      </a:r>
+                    </a:p>
+                  </a:txBody>
+                  <a:tcPr>
+                    <a:solidFill>
+                      <a:srgbClr val="FFFFFF"/>
+                    </a:solidFill>
+                  </a:tcPr>
+                </a:tc>
+                <a:tc>
+                  <a:txBody>
+                    <a:bodyPr/>
+                    <a:lstStyle/>
+                    <a:p>
+                      <a:pPr algn="r">
+                        <a:defRPr>
+                          <a:latin typeface="Roboto"/>
+                        </a:defRPr>
+                      </a:pPr>
+                      <a:r>
+                        <a:rPr sz="1050" b="1">
+                          <a:solidFill>
+                            <a:srgbClr val="25342A"/>
+                          </a:solidFill>
+                          <a:latin typeface="Roboto"/>
+                        </a:rPr>
+                        <a:t>314,810</a:t>
+                      </a:r>
+                    </a:p>
+                  </a:txBody>
+                  <a:tcPr>
+                    <a:solidFill>
+                      <a:srgbClr val="FFFFFF"/>
+                    </a:solidFill>
+                  </a:tcPr>
+                </a:tc>
+                <a:tc>
+                  <a:txBody>
+                    <a:bodyPr/>
+                    <a:lstStyle/>
+                    <a:p>
+                      <a:pPr algn="r">
+                        <a:defRPr>
+                          <a:latin typeface="Roboto"/>
+                        </a:defRPr>
+                      </a:pPr>
+                      <a:r>
+                        <a:rPr sz="1050" b="1">
+                          <a:solidFill>
+                            <a:srgbClr val="25342A"/>
+                          </a:solidFill>
+                          <a:latin typeface="Roboto"/>
+                        </a:rPr>
+                        <a:t>267,658</a:t>
+                      </a:r>
+                    </a:p>
+                  </a:txBody>
+                  <a:tcPr>
+                    <a:solidFill>
+                      <a:srgbClr val="FFFFFF"/>
+                    </a:solidFill>
+                  </a:tcPr>
+                </a:tc>
+                <a:tc>
+                  <a:txBody>
+                    <a:bodyPr/>
+                    <a:lstStyle/>
+                    <a:p>
+                      <a:pPr algn="r">
+                        <a:defRPr>
+                          <a:latin typeface="Roboto"/>
+                        </a:defRPr>
+                      </a:pPr>
+                      <a:r>
+                        <a:rPr sz="1050" b="1">
+                          <a:solidFill>
+                            <a:srgbClr val="25342A"/>
+                          </a:solidFill>
+                          <a:latin typeface="Roboto"/>
+                        </a:rPr>
+                        <a:t>47,152</a:t>
+                      </a:r>
+                    </a:p>
+                  </a:txBody>
+                  <a:tcPr>
+                    <a:solidFill>
+                      <a:srgbClr val="FFFFFF"/>
+                    </a:solidFill>
+                  </a:tcPr>
+                </a:tc>
+              </a:tr>
+              <a:tr h="310896">
+                <a:tc>
+                  <a:txBody>
+                    <a:bodyPr/>
+                    <a:lstStyle/>
+                    <a:p>
+                      <a:pPr algn="l">
+                        <a:defRPr>
+                          <a:latin typeface="Roboto"/>
+                        </a:defRPr>
+                      </a:pPr>
+                      <a:r>
+                        <a:rPr sz="1050" b="1">
+                          <a:solidFill>
+                            <a:srgbClr val="25342A"/>
+                          </a:solidFill>
+                          <a:latin typeface="Roboto"/>
+                        </a:rPr>
+                        <a:t>Net assets</a:t>
+                      </a:r>
+                    </a:p>
+                  </a:txBody>
+                  <a:tcPr>
+                    <a:solidFill>
+                      <a:srgbClr val="F7FAF7"/>
+                    </a:solidFill>
+                  </a:tcPr>
+                </a:tc>
+                <a:tc>
+                  <a:txBody>
+                    <a:bodyPr/>
+                    <a:lstStyle/>
+                    <a:p>
+                      <a:pPr algn="r">
+                        <a:defRPr>
+                          <a:latin typeface="Roboto"/>
+                        </a:defRPr>
+                      </a:pPr>
+                      <a:r>
+                        <a:rPr sz="1050" b="1">
+                          <a:solidFill>
+                            <a:srgbClr val="25342A"/>
+                          </a:solidFill>
+                          <a:latin typeface="Roboto"/>
+                        </a:rPr>
+                        <a:t>219,573</a:t>
+                      </a:r>
+                    </a:p>
+                  </a:txBody>
+                  <a:tcPr>
+                    <a:solidFill>
+                      <a:srgbClr val="F7FAF7"/>
+                    </a:solidFill>
+                  </a:tcPr>
+                </a:tc>
+                <a:tc>
+                  <a:txBody>
+                    <a:bodyPr/>
+                    <a:lstStyle/>
+                    <a:p>
+                      <a:pPr algn="r">
+                        <a:defRPr>
+                          <a:latin typeface="Roboto"/>
+                        </a:defRPr>
+                      </a:pPr>
+                      <a:r>
+                        <a:rPr sz="1050" b="1">
+                          <a:solidFill>
+                            <a:srgbClr val="25342A"/>
+                          </a:solidFill>
+                          <a:latin typeface="Roboto"/>
+                        </a:rPr>
+                        <a:t>208,025</a:t>
+                      </a:r>
+                    </a:p>
+                  </a:txBody>
+                  <a:tcPr>
+                    <a:solidFill>
+                      <a:srgbClr val="F7FAF7"/>
+                    </a:solidFill>
+                  </a:tcPr>
+                </a:tc>
+                <a:tc>
+                  <a:txBody>
+                    <a:bodyPr/>
+                    <a:lstStyle/>
+                    <a:p>
+                      <a:pPr algn="r">
+                        <a:defRPr>
+                          <a:latin typeface="Roboto"/>
+                        </a:defRPr>
+                      </a:pPr>
+                      <a:r>
+                        <a:rPr sz="1050" b="1">
+                          <a:solidFill>
+                            <a:srgbClr val="25342A"/>
+                          </a:solidFill>
+                          <a:latin typeface="Roboto"/>
+                        </a:rPr>
+                        <a:t>11,548</a:t>
+                      </a:r>
+                    </a:p>
+                  </a:txBody>
+                  <a:tcPr>
+                    <a:solidFill>
+                      <a:srgbClr val="F7FAF7"/>
+                    </a:solidFill>
+                  </a:tcPr>
+                </a:tc>
+              </a:tr>
+              <a:tr h="310896">
+                <a:tc>
+                  <a:txBody>
+                    <a:bodyPr/>
+                    <a:lstStyle/>
+                    <a:p>
+                      <a:pPr algn="l">
+                        <a:defRPr>
+                          <a:latin typeface="Roboto"/>
+                        </a:defRPr>
+                      </a:pPr>
+                      <a:r>
+                        <a:rPr sz="1050">
+                          <a:solidFill>
+                            <a:srgbClr val="25342A"/>
+                          </a:solidFill>
+                          <a:latin typeface="Roboto"/>
+                        </a:rPr>
+                        <a:t>Share capital</a:t>
+                      </a:r>
+                    </a:p>
+                  </a:txBody>
+                  <a:tcPr>
+                    <a:solidFill>
+                      <a:srgbClr val="FFFFFF"/>
+                    </a:solidFill>
+                  </a:tcPr>
+                </a:tc>
+                <a:tc>
+                  <a:txBody>
+                    <a:bodyPr/>
+                    <a:lstStyle/>
+                    <a:p>
+                      <a:pPr algn="r">
+                        <a:defRPr>
+                          <a:latin typeface="Roboto"/>
+                        </a:defRPr>
+                      </a:pPr>
+                      <a:r>
+                        <a:rPr sz="1050">
+                          <a:solidFill>
+                            <a:srgbClr val="25342A"/>
+                          </a:solidFill>
+                          <a:latin typeface="Roboto"/>
+                        </a:rPr>
+                        <a:t>20,000</a:t>
+                      </a:r>
+                    </a:p>
+                  </a:txBody>
+                  <a:tcPr>
+                    <a:solidFill>
+                      <a:srgbClr val="FFFFFF"/>
+                    </a:solidFill>
+                  </a:tcPr>
+                </a:tc>
+                <a:tc>
+                  <a:txBody>
+                    <a:bodyPr/>
+                    <a:lstStyle/>
+                    <a:p>
+                      <a:pPr algn="r">
+                        <a:defRPr>
+                          <a:latin typeface="Roboto"/>
+                        </a:defRPr>
+                      </a:pPr>
+                      <a:r>
+                        <a:rPr sz="1050">
+                          <a:solidFill>
+                            <a:srgbClr val="25342A"/>
+                          </a:solidFill>
+                          <a:latin typeface="Roboto"/>
+                        </a:rPr>
+                        <a:t>20,000</a:t>
+                      </a:r>
+                    </a:p>
+                  </a:txBody>
+                  <a:tcPr>
+                    <a:solidFill>
+                      <a:srgbClr val="FFFFFF"/>
+                    </a:solidFill>
+                  </a:tcPr>
+                </a:tc>
+                <a:tc>
+                  <a:txBody>
+                    <a:bodyPr/>
+                    <a:lstStyle/>
+                    <a:p>
+                      <a:pPr algn="r">
+                        <a:defRPr>
+                          <a:latin typeface="Roboto"/>
+                        </a:defRPr>
+                      </a:pPr>
+                      <a:r>
+                        <a:rPr sz="1050">
+                          <a:solidFill>
+                            <a:srgbClr val="25342A"/>
+                          </a:solidFill>
+                          <a:latin typeface="Roboto"/>
+                        </a:rPr>
+                        <a:t>-</a:t>
+                      </a:r>
+                    </a:p>
+                  </a:txBody>
+                  <a:tcPr>
+                    <a:solidFill>
+                      <a:srgbClr val="FFFFFF"/>
+                    </a:solidFill>
+                  </a:tcPr>
+                </a:tc>
+              </a:tr>
+              <a:tr h="310896">
+                <a:tc>
+                  <a:txBody>
+                    <a:bodyPr/>
+                    <a:lstStyle/>
+                    <a:p>
+                      <a:pPr algn="l">
+                        <a:defRPr>
+                          <a:latin typeface="Roboto"/>
+                        </a:defRPr>
+                      </a:pPr>
+                      <a:r>
+                        <a:rPr sz="1050">
+                          <a:solidFill>
+                            <a:srgbClr val="25342A"/>
+                          </a:solidFill>
+                          <a:latin typeface="Roboto"/>
+                        </a:rPr>
+                        <a:t>Retained earnings</a:t>
+                      </a:r>
+                    </a:p>
+                  </a:txBody>
+                  <a:tcPr>
+                    <a:solidFill>
+                      <a:srgbClr val="F7FAF7"/>
+                    </a:solidFill>
+                  </a:tcPr>
+                </a:tc>
+                <a:tc>
+                  <a:txBody>
+                    <a:bodyPr/>
+                    <a:lstStyle/>
+                    <a:p>
+                      <a:pPr algn="r">
+                        <a:defRPr>
+                          <a:latin typeface="Roboto"/>
+                        </a:defRPr>
+                      </a:pPr>
+                      <a:r>
+                        <a:rPr sz="1050">
+                          <a:solidFill>
+                            <a:srgbClr val="25342A"/>
+                          </a:solidFill>
+                          <a:latin typeface="Roboto"/>
+                        </a:rPr>
+                        <a:t>199,573</a:t>
+                      </a:r>
+                    </a:p>
+                  </a:txBody>
+                  <a:tcPr>
+                    <a:solidFill>
+                      <a:srgbClr val="F7FAF7"/>
+                    </a:solidFill>
+                  </a:tcPr>
+                </a:tc>
+                <a:tc>
+                  <a:txBody>
+                    <a:bodyPr/>
+                    <a:lstStyle/>
+                    <a:p>
+                      <a:pPr algn="r">
+                        <a:defRPr>
+                          <a:latin typeface="Roboto"/>
+                        </a:defRPr>
+                      </a:pPr>
+                      <a:r>
+                        <a:rPr sz="1050">
+                          <a:solidFill>
+                            <a:srgbClr val="25342A"/>
+                          </a:solidFill>
+                          <a:latin typeface="Roboto"/>
+                        </a:rPr>
+                        <a:t>188,025</a:t>
+                      </a:r>
+                    </a:p>
+                  </a:txBody>
+                  <a:tcPr>
+                    <a:solidFill>
+                      <a:srgbClr val="F7FAF7"/>
+                    </a:solidFill>
+                  </a:tcPr>
+                </a:tc>
+                <a:tc>
+                  <a:txBody>
+                    <a:bodyPr/>
+                    <a:lstStyle/>
+                    <a:p>
+                      <a:pPr algn="r">
+                        <a:defRPr>
+                          <a:latin typeface="Roboto"/>
+                        </a:defRPr>
+                      </a:pPr>
+                      <a:r>
+                        <a:rPr sz="1050">
+                          <a:solidFill>
+                            <a:srgbClr val="25342A"/>
+                          </a:solidFill>
+                          <a:latin typeface="Roboto"/>
+                        </a:rPr>
+                        <a:t>11,548</a:t>
+                      </a:r>
+                    </a:p>
+                  </a:txBody>
+                  <a:tcPr>
+                    <a:solidFill>
+                      <a:srgbClr val="F7FAF7"/>
+                    </a:solidFill>
+                  </a:tcPr>
+                </a:tc>
+              </a:tr>
+              <a:tr h="310896">
+                <a:tc>
+                  <a:txBody>
+                    <a:bodyPr/>
+                    <a:lstStyle/>
+                    <a:p>
+                      <a:pPr algn="l">
+                        <a:defRPr>
+                          <a:latin typeface="Roboto"/>
+                        </a:defRPr>
+                      </a:pPr>
+                      <a:r>
+                        <a:rPr sz="1050" b="1">
+                          <a:solidFill>
+                            <a:srgbClr val="25342A"/>
+                          </a:solidFill>
+                          <a:latin typeface="Roboto"/>
+                        </a:rPr>
                         <a:t>Total equity</a:t>
                       </a:r>
                     </a:p>
@@ -8137,7 +8648,7 @@
                           </a:solidFill>
                           <a:latin typeface="Roboto"/>
                         </a:rPr>
-                        <a:t>231,749</a:t>
+                        <a:t>219,573</a:t>
                       </a:r>
                     </a:p>
                   </a:txBody>
@@ -8164,7 +8675,7 @@
                           </a:solidFill>
                           <a:latin typeface="Roboto"/>
                         </a:rPr>
-                        <a:t>220,042</a:t>
+                        <a:t>208,025</a:t>
                       </a:r>
                     </a:p>
                   </a:txBody>
@@ -8191,7 +8702,7 @@
                           </a:solidFill>
                           <a:latin typeface="Roboto"/>
                         </a:rPr>
-                        <a:t>11,707</a:t>
+                        <a:t>11,548</a:t>
                       </a:r>
                     </a:p>
                   </a:txBody>
@@ -8279,7 +8790,7 @@
                 </a:solidFill>
                 <a:latin typeface="Roboto"/>
               </a:rPr>
-              <a:t>Data retrieved 2pm, Tue 6 Oct 2026 · Generated 8 Oct 2026, 9:30pm · Sample data · Made with Python (python-pptx)</a:t>
+              <a:t>Data retrieved 2pm, Tue 6 Oct 2026 · Generated 9 Oct 2026, 8:45am · Sample data · Made with Python (python-pptx)</a:t>
             </a:r>
           </a:p>
         </p:txBody>
@@ -8318,7 +8829,7 @@
                 </a:solidFill>
                 <a:latin typeface="Roboto"/>
               </a:rPr>
-              <a:t>Slide 11 of 17</a:t>
+              <a:t>Slide 11 of 18</a:t>
             </a:r>
           </a:p>
         </p:txBody>
@@ -8643,7 +9154,7 @@
                           </a:solidFill>
                           <a:latin typeface="Roboto"/>
                         </a:rPr>
-                        <a:t>64,950</a:t>
+                        <a:t>78,485</a:t>
                       </a:r>
                     </a:p>
                   </a:txBody>
@@ -8670,7 +9181,7 @@
                           </a:solidFill>
                           <a:latin typeface="Roboto"/>
                         </a:rPr>
-                        <a:t>137,200</a:t>
+                        <a:t>166,100</a:t>
                       </a:r>
                     </a:p>
                   </a:txBody>
@@ -8697,7 +9208,7 @@
                           </a:solidFill>
                           <a:latin typeface="Roboto"/>
                         </a:rPr>
-                        <a:t>(72,250)</a:t>
+                        <a:t>(87,615)</a:t>
                       </a:r>
                     </a:p>
                   </a:txBody>
@@ -8753,7 +9264,7 @@
                           </a:solidFill>
                           <a:latin typeface="Roboto"/>
                         </a:rPr>
-                        <a:t>(32,800)</a:t>
+                        <a:t>(36,080)</a:t>
                       </a:r>
                     </a:p>
                   </a:txBody>
@@ -8780,7 +9291,7 @@
                           </a:solidFill>
                           <a:latin typeface="Roboto"/>
                         </a:rPr>
-                        <a:t>(31,300)</a:t>
+                        <a:t>(34,430)</a:t>
                       </a:r>
                     </a:p>
                   </a:txBody>
@@ -8807,7 +9318,7 @@
                           </a:solidFill>
                           <a:latin typeface="Roboto"/>
                         </a:rPr>
-                        <a:t>(1,500)</a:t>
+                        <a:t>(1,650)</a:t>
                       </a:r>
                     </a:p>
                   </a:txBody>
@@ -8863,7 +9374,7 @@
                           </a:solidFill>
                           <a:latin typeface="Roboto"/>
                         </a:rPr>
-                        <a:t>(69,900)</a:t>
+                        <a:t>(58,442)</a:t>
                       </a:r>
                     </a:p>
                   </a:txBody>
@@ -8890,7 +9401,7 @@
                           </a:solidFill>
                           <a:latin typeface="Roboto"/>
                         </a:rPr>
-                        <a:t>(69,800)</a:t>
+                        <a:t>(58,442)</a:t>
                       </a:r>
                     </a:p>
                   </a:txBody>
@@ -8913,11 +9424,11 @@
                       <a:r>
                         <a:rPr sz="1050">
                           <a:solidFill>
-                            <a:srgbClr val="B42318"/>
-                          </a:solidFill>
-                          <a:latin typeface="Roboto"/>
-                        </a:rPr>
-                        <a:t>(100)</a:t>
+                            <a:srgbClr val="25342A"/>
+                          </a:solidFill>
+                          <a:latin typeface="Roboto"/>
+                        </a:rPr>
+                        <a:t>-</a:t>
                       </a:r>
                     </a:p>
                   </a:txBody>
@@ -9056,7 +9567,7 @@
                           </a:solidFill>
                           <a:latin typeface="Roboto"/>
                         </a:rPr>
-                        <a:t>Income tax paid</a:t>
+                        <a:t>GST, PAYG and income tax paid (BAS)</a:t>
                       </a:r>
                     </a:p>
                   </a:txBody>
@@ -9193,7 +9704,7 @@
                           </a:solidFill>
                           <a:latin typeface="Roboto"/>
                         </a:rPr>
-                        <a:t>(37,990)</a:t>
+                        <a:t>(16,277)</a:t>
                       </a:r>
                     </a:p>
                   </a:txBody>
@@ -9220,7 +9731,7 @@
                           </a:solidFill>
                           <a:latin typeface="Roboto"/>
                         </a:rPr>
-                        <a:t>35,850</a:t>
+                        <a:t>72,978</a:t>
                       </a:r>
                     </a:p>
                   </a:txBody>
@@ -9247,7 +9758,7 @@
                           </a:solidFill>
                           <a:latin typeface="Roboto"/>
                         </a:rPr>
-                        <a:t>(73,840)</a:t>
+                        <a:t>(89,255)</a:t>
                       </a:r>
                     </a:p>
                   </a:txBody>
@@ -9303,7 +9814,7 @@
                           </a:solidFill>
                           <a:latin typeface="Roboto"/>
                         </a:rPr>
-                        <a:t>(3,200)</a:t>
+                        <a:t>(3,520)</a:t>
                       </a:r>
                     </a:p>
                   </a:txBody>
@@ -9357,7 +9868,7 @@
                           </a:solidFill>
                           <a:latin typeface="Roboto"/>
                         </a:rPr>
-                        <a:t>(3,200)</a:t>
+                        <a:t>(3,520)</a:t>
                       </a:r>
                     </a:p>
                   </a:txBody>
@@ -9413,7 +9924,7 @@
                           </a:solidFill>
                           <a:latin typeface="Roboto"/>
                         </a:rPr>
-                        <a:t>(3,200)</a:t>
+                        <a:t>(3,520)</a:t>
                       </a:r>
                     </a:p>
                   </a:txBody>
@@ -9467,7 +9978,7 @@
                           </a:solidFill>
                           <a:latin typeface="Roboto"/>
                         </a:rPr>
-                        <a:t>(3,200)</a:t>
+                        <a:t>(3,520)</a:t>
                       </a:r>
                     </a:p>
                   </a:txBody>
@@ -9743,7 +10254,7 @@
                           </a:solidFill>
                           <a:latin typeface="Roboto"/>
                         </a:rPr>
-                        <a:t>(42,890)</a:t>
+                        <a:t>(21,497)</a:t>
                       </a:r>
                     </a:p>
                   </a:txBody>
@@ -9770,7 +10281,7 @@
                           </a:solidFill>
                           <a:latin typeface="Roboto"/>
                         </a:rPr>
-                        <a:t>34,150</a:t>
+                        <a:t>71,278</a:t>
                       </a:r>
                     </a:p>
                   </a:txBody>
@@ -9797,7 +10308,7 @@
                           </a:solidFill>
                           <a:latin typeface="Roboto"/>
                         </a:rPr>
-                        <a:t>(77,040)</a:t>
+                        <a:t>(92,775)</a:t>
                       </a:r>
                     </a:p>
                   </a:txBody>
@@ -9853,7 +10364,7 @@
                           </a:solidFill>
                           <a:latin typeface="Roboto"/>
                         </a:rPr>
-                        <a:t>192,150</a:t>
+                        <a:t>229,278</a:t>
                       </a:r>
                     </a:p>
                   </a:txBody>
@@ -9907,7 +10418,7 @@
                           </a:solidFill>
                           <a:latin typeface="Roboto"/>
                         </a:rPr>
-                        <a:t>34,150</a:t>
+                        <a:t>71,278</a:t>
                       </a:r>
                     </a:p>
                   </a:txBody>
@@ -9963,7 +10474,7 @@
                           </a:solidFill>
                           <a:latin typeface="Roboto"/>
                         </a:rPr>
-                        <a:t>149,260</a:t>
+                        <a:t>207,781</a:t>
                       </a:r>
                     </a:p>
                   </a:txBody>
@@ -9990,7 +10501,7 @@
                           </a:solidFill>
                           <a:latin typeface="Roboto"/>
                         </a:rPr>
-                        <a:t>192,150</a:t>
+                        <a:t>229,278</a:t>
                       </a:r>
                     </a:p>
                   </a:txBody>
@@ -10017,7 +10528,7 @@
                           </a:solidFill>
                           <a:latin typeface="Roboto"/>
                         </a:rPr>
-                        <a:t>(42,890)</a:t>
+                        <a:t>(21,497)</a:t>
                       </a:r>
                     </a:p>
                   </a:txBody>
@@ -10105,7 +10616,7 @@
                 </a:solidFill>
                 <a:latin typeface="Roboto"/>
               </a:rPr>
-              <a:t>Data retrieved 2pm, Tue 6 Oct 2026 · Generated 8 Oct 2026, 9:30pm · Sample data · Made with Python (python-pptx)</a:t>
+              <a:t>Data retrieved 2pm, Tue 6 Oct 2026 · Generated 9 Oct 2026, 8:45am · Sample data · Made with Python (python-pptx)</a:t>
             </a:r>
           </a:p>
         </p:txBody>
@@ -10144,7 +10655,7 @@
                 </a:solidFill>
                 <a:latin typeface="Roboto"/>
               </a:rPr>
-              <a:t>Slide 12 of 17</a:t>
+              <a:t>Slide 12 of 18</a:t>
             </a:r>
           </a:p>
         </p:txBody>
@@ -10635,7 +11146,7 @@
                           </a:solidFill>
                           <a:latin typeface="Roboto"/>
                         </a:rPr>
-                        <a:t>12,000</a:t>
+                        <a:t>13,200</a:t>
                       </a:r>
                     </a:p>
                   </a:txBody>
@@ -10662,7 +11173,7 @@
                           </a:solidFill>
                           <a:latin typeface="Roboto"/>
                         </a:rPr>
-                        <a:t>12,000</a:t>
+                        <a:t>13,200</a:t>
                       </a:r>
                     </a:p>
                   </a:txBody>
@@ -10716,7 +11227,7 @@
                           </a:solidFill>
                           <a:latin typeface="Roboto"/>
                         </a:rPr>
-                        <a:t>7,800</a:t>
+                        <a:t>9,000</a:t>
                       </a:r>
                     </a:p>
                   </a:txBody>
@@ -10743,7 +11254,7 @@
                           </a:solidFill>
                           <a:latin typeface="Roboto"/>
                         </a:rPr>
-                        <a:t>65.0</a:t>
+                        <a:t>68.2</a:t>
                       </a:r>
                     </a:p>
                   </a:txBody>
@@ -10853,7 +11364,7 @@
                           </a:solidFill>
                           <a:latin typeface="Roboto"/>
                         </a:rPr>
-                        <a:t>9,500</a:t>
+                        <a:t>10,400</a:t>
                       </a:r>
                     </a:p>
                   </a:txBody>
@@ -10880,7 +11391,7 @@
                           </a:solidFill>
                           <a:latin typeface="Roboto"/>
                         </a:rPr>
-                        <a:t>9,500</a:t>
+                        <a:t>10,400</a:t>
                       </a:r>
                     </a:p>
                   </a:txBody>
@@ -10934,7 +11445,7 @@
                           </a:solidFill>
                           <a:latin typeface="Roboto"/>
                         </a:rPr>
-                        <a:t>6,020</a:t>
+                        <a:t>6,920</a:t>
                       </a:r>
                     </a:p>
                   </a:txBody>
@@ -10961,7 +11472,7 @@
                           </a:solidFill>
                           <a:latin typeface="Roboto"/>
                         </a:rPr>
-                        <a:t>63.4</a:t>
+                        <a:t>66.5</a:t>
                       </a:r>
                     </a:p>
                   </a:txBody>
@@ -11071,7 +11582,7 @@
                           </a:solidFill>
                           <a:latin typeface="Roboto"/>
                         </a:rPr>
-                        <a:t>6,800</a:t>
+                        <a:t>7,500</a:t>
                       </a:r>
                     </a:p>
                   </a:txBody>
@@ -11098,7 +11609,7 @@
                           </a:solidFill>
                           <a:latin typeface="Roboto"/>
                         </a:rPr>
-                        <a:t>6,800</a:t>
+                        <a:t>7,500</a:t>
                       </a:r>
                     </a:p>
                   </a:txBody>
@@ -11152,7 +11663,7 @@
                           </a:solidFill>
                           <a:latin typeface="Roboto"/>
                         </a:rPr>
-                        <a:t>4,160</a:t>
+                        <a:t>4,860</a:t>
                       </a:r>
                     </a:p>
                   </a:txBody>
@@ -11179,7 +11690,7 @@
                           </a:solidFill>
                           <a:latin typeface="Roboto"/>
                         </a:rPr>
-                        <a:t>61.2</a:t>
+                        <a:t>64.8</a:t>
                       </a:r>
                     </a:p>
                   </a:txBody>
@@ -11289,7 +11800,7 @@
                           </a:solidFill>
                           <a:latin typeface="Roboto"/>
                         </a:rPr>
-                        <a:t>8,800</a:t>
+                        <a:t>9,700</a:t>
                       </a:r>
                     </a:p>
                   </a:txBody>
@@ -11316,7 +11827,7 @@
                           </a:solidFill>
                           <a:latin typeface="Roboto"/>
                         </a:rPr>
-                        <a:t>8,800</a:t>
+                        <a:t>9,700</a:t>
                       </a:r>
                     </a:p>
                   </a:txBody>
@@ -11370,7 +11881,7 @@
                           </a:solidFill>
                           <a:latin typeface="Roboto"/>
                         </a:rPr>
-                        <a:t>2,440</a:t>
+                        <a:t>3,340</a:t>
                       </a:r>
                     </a:p>
                   </a:txBody>
@@ -11397,7 +11908,7 @@
                           </a:solidFill>
                           <a:latin typeface="Roboto"/>
                         </a:rPr>
-                        <a:t>27.7</a:t>
+                        <a:t>34.4</a:t>
                       </a:r>
                     </a:p>
                   </a:txBody>
@@ -11507,7 +12018,7 @@
                           </a:solidFill>
                           <a:latin typeface="Roboto"/>
                         </a:rPr>
-                        <a:t>10,560</a:t>
+                        <a:t>11,520</a:t>
                       </a:r>
                     </a:p>
                   </a:txBody>
@@ -11534,7 +12045,7 @@
                           </a:solidFill>
                           <a:latin typeface="Roboto"/>
                         </a:rPr>
-                        <a:t>10,560</a:t>
+                        <a:t>11,520</a:t>
                       </a:r>
                     </a:p>
                   </a:txBody>
@@ -11588,7 +12099,7 @@
                           </a:solidFill>
                           <a:latin typeface="Roboto"/>
                         </a:rPr>
-                        <a:t>6,720</a:t>
+                        <a:t>7,680</a:t>
                       </a:r>
                     </a:p>
                   </a:txBody>
@@ -11615,7 +12126,7 @@
                           </a:solidFill>
                           <a:latin typeface="Roboto"/>
                         </a:rPr>
-                        <a:t>63.6</a:t>
+                        <a:t>66.7</a:t>
                       </a:r>
                     </a:p>
                   </a:txBody>
@@ -11725,7 +12236,7 @@
                           </a:solidFill>
                           <a:latin typeface="Roboto"/>
                         </a:rPr>
-                        <a:t>4,200</a:t>
+                        <a:t>4,600</a:t>
                       </a:r>
                     </a:p>
                   </a:txBody>
@@ -11752,7 +12263,7 @@
                           </a:solidFill>
                           <a:latin typeface="Roboto"/>
                         </a:rPr>
-                        <a:t>4,200</a:t>
+                        <a:t>4,600</a:t>
                       </a:r>
                     </a:p>
                   </a:txBody>
@@ -11806,7 +12317,7 @@
                           </a:solidFill>
                           <a:latin typeface="Roboto"/>
                         </a:rPr>
-                        <a:t>1,080</a:t>
+                        <a:t>1,480</a:t>
                       </a:r>
                     </a:p>
                   </a:txBody>
@@ -11833,7 +12344,7 @@
                           </a:solidFill>
                           <a:latin typeface="Roboto"/>
                         </a:rPr>
-                        <a:t>25.7</a:t>
+                        <a:t>32.2</a:t>
                       </a:r>
                     </a:p>
                   </a:txBody>
@@ -11943,7 +12454,7 @@
                           </a:solidFill>
                           <a:latin typeface="Roboto"/>
                         </a:rPr>
-                        <a:t>36,750</a:t>
+                        <a:t>40,950</a:t>
                       </a:r>
                     </a:p>
                   </a:txBody>
@@ -11970,7 +12481,7 @@
                           </a:solidFill>
                           <a:latin typeface="Roboto"/>
                         </a:rPr>
-                        <a:t>30,000</a:t>
+                        <a:t>33,400</a:t>
                       </a:r>
                     </a:p>
                   </a:txBody>
@@ -12024,7 +12535,7 @@
                           </a:solidFill>
                           <a:latin typeface="Roboto"/>
                         </a:rPr>
-                        <a:t>12,950</a:t>
+                        <a:t>17,150</a:t>
                       </a:r>
                     </a:p>
                   </a:txBody>
@@ -12051,7 +12562,7 @@
                           </a:solidFill>
                           <a:latin typeface="Roboto"/>
                         </a:rPr>
-                        <a:t>35.2</a:t>
+                        <a:t>41.9</a:t>
                       </a:r>
                     </a:p>
                   </a:txBody>
@@ -12161,7 +12672,7 @@
                           </a:solidFill>
                           <a:latin typeface="Roboto"/>
                         </a:rPr>
-                        <a:t>20,400</a:t>
+                        <a:t>22,200</a:t>
                       </a:r>
                     </a:p>
                   </a:txBody>
@@ -12188,7 +12699,7 @@
                           </a:solidFill>
                           <a:latin typeface="Roboto"/>
                         </a:rPr>
-                        <a:t>24,000</a:t>
+                        <a:t>26,100</a:t>
                       </a:r>
                     </a:p>
                   </a:txBody>
@@ -12242,7 +12753,7 @@
                           </a:solidFill>
                           <a:latin typeface="Roboto"/>
                         </a:rPr>
-                        <a:t>11,000</a:t>
+                        <a:t>12,800</a:t>
                       </a:r>
                     </a:p>
                   </a:txBody>
@@ -12269,7 +12780,7 @@
                           </a:solidFill>
                           <a:latin typeface="Roboto"/>
                         </a:rPr>
-                        <a:t>53.9</a:t>
+                        <a:t>57.7</a:t>
                       </a:r>
                     </a:p>
                   </a:txBody>
@@ -12379,7 +12890,7 @@
                           </a:solidFill>
                           <a:latin typeface="Roboto"/>
                         </a:rPr>
-                        <a:t>4,600</a:t>
+                        <a:t>5,100</a:t>
                       </a:r>
                     </a:p>
                   </a:txBody>
@@ -12406,7 +12917,7 @@
                           </a:solidFill>
                           <a:latin typeface="Roboto"/>
                         </a:rPr>
-                        <a:t>4,600</a:t>
+                        <a:t>5,100</a:t>
                       </a:r>
                     </a:p>
                   </a:txBody>
@@ -12460,7 +12971,7 @@
                           </a:solidFill>
                           <a:latin typeface="Roboto"/>
                         </a:rPr>
-                        <a:t>3,760</a:t>
+                        <a:t>4,260</a:t>
                       </a:r>
                     </a:p>
                   </a:txBody>
@@ -12487,7 +12998,7 @@
                           </a:solidFill>
                           <a:latin typeface="Roboto"/>
                         </a:rPr>
-                        <a:t>81.7</a:t>
+                        <a:t>83.5</a:t>
                       </a:r>
                     </a:p>
                   </a:txBody>
@@ -12597,7 +13108,7 @@
                           </a:solidFill>
                           <a:latin typeface="Roboto"/>
                         </a:rPr>
-                        <a:t>18,240</a:t>
+                        <a:t>20,160</a:t>
                       </a:r>
                     </a:p>
                   </a:txBody>
@@ -12678,7 +13189,7 @@
                           </a:solidFill>
                           <a:latin typeface="Roboto"/>
                         </a:rPr>
-                        <a:t>12,480</a:t>
+                        <a:t>14,400</a:t>
                       </a:r>
                     </a:p>
                   </a:txBody>
@@ -12705,7 +13216,7 @@
                           </a:solidFill>
                           <a:latin typeface="Roboto"/>
                         </a:rPr>
-                        <a:t>68.4</a:t>
+                        <a:t>71.4</a:t>
                       </a:r>
                     </a:p>
                   </a:txBody>
@@ -12793,7 +13304,7 @@
                 </a:solidFill>
                 <a:latin typeface="Roboto"/>
               </a:rPr>
-              <a:t>Data retrieved 2pm, Tue 6 Oct 2026 · Generated 8 Oct 2026, 9:30pm · Sample data · Made with Python (python-pptx)</a:t>
+              <a:t>Data retrieved 2pm, Tue 6 Oct 2026 · Generated 9 Oct 2026, 8:45am · Sample data · Made with Python (python-pptx)</a:t>
             </a:r>
           </a:p>
         </p:txBody>
@@ -12832,7 +13343,7 @@
                 </a:solidFill>
                 <a:latin typeface="Roboto"/>
               </a:rPr>
-              <a:t>Slide 13 of 17</a:t>
+              <a:t>Slide 13 of 18</a:t>
             </a:r>
           </a:p>
         </p:txBody>
@@ -13245,7 +13756,7 @@
                 </a:solidFill>
                 <a:latin typeface="Roboto"/>
               </a:rPr>
-              <a:t>Data retrieved 2pm, Tue 6 Oct 2026 · Generated 8 Oct 2026, 9:30pm · Sample data · Made with Python (python-pptx)</a:t>
+              <a:t>Data retrieved 2pm, Tue 6 Oct 2026 · Generated 9 Oct 2026, 8:45am · Sample data · Made with Python (python-pptx)</a:t>
             </a:r>
           </a:p>
         </p:txBody>
@@ -13284,7 +13795,7 @@
                 </a:solidFill>
                 <a:latin typeface="Roboto"/>
               </a:rPr>
-              <a:t>Slide 14 of 17</a:t>
+              <a:t>Slide 14 of 18</a:t>
             </a:r>
           </a:p>
         </p:txBody>
@@ -13753,7 +14264,7 @@
                 </a:solidFill>
                 <a:latin typeface="Roboto"/>
               </a:rPr>
-              <a:t>Data retrieved 2pm, Tue 6 Oct 2026 · Generated 8 Oct 2026, 9:30pm · Sample data · Made with Python (python-pptx)</a:t>
+              <a:t>Data retrieved 2pm, Tue 6 Oct 2026 · Generated 9 Oct 2026, 8:45am · Sample data · Made with Python (python-pptx)</a:t>
             </a:r>
           </a:p>
         </p:txBody>
@@ -13792,7 +14303,7 @@
                 </a:solidFill>
                 <a:latin typeface="Roboto"/>
               </a:rPr>
-              <a:t>Slide 15 of 17</a:t>
+              <a:t>Slide 15 of 18</a:t>
             </a:r>
           </a:p>
         </p:txBody>
@@ -14005,7 +14516,7 @@
                           </a:solidFill>
                           <a:latin typeface="Roboto"/>
                         </a:rPr>
-                        <a:t>6 on salary: $46,500 a month incl. on-costs</a:t>
+                        <a:t>6 employed full time: $60,192 in September incl. on-costs (every available hour at $60)</a:t>
                       </a:r>
                     </a:p>
                   </a:txBody>
@@ -14061,7 +14572,7 @@
                           </a:solidFill>
                           <a:latin typeface="Roboto"/>
                         </a:rPr>
-                        <a:t>$60/hour for consultant time</a:t>
+                        <a:t>$60/hour = consultant salaries incl. on-costs ÷ available hours, worked out each month; time charged to clients + time not charged = salaries</a:t>
                       </a:r>
                     </a:p>
                   </a:txBody>
@@ -14117,7 +14628,7 @@
                           </a:solidFill>
                           <a:latin typeface="Roboto"/>
                         </a:rPr>
-                        <a:t>20 in August (Ekka show holiday), 22 in September; 7.6 hours a day</a:t>
+                        <a:t>20 in August (21 weekdays, less the Ekka People's Day holiday, Wed 12 Aug), 22 in September; 7.6 hours a day</a:t>
                       </a:r>
                     </a:p>
                   </a:txBody>
@@ -14261,7 +14772,7 @@
                 </a:solidFill>
                 <a:latin typeface="Roboto"/>
               </a:rPr>
-              <a:t>Data retrieved 2pm, Tue 6 Oct 2026 · Generated 8 Oct 2026, 9:30pm · Sample data · Made with Python (python-pptx)</a:t>
+              <a:t>Data retrieved 2pm, Tue 6 Oct 2026 · Generated 9 Oct 2026, 8:45am · Sample data · Made with Python (python-pptx)</a:t>
             </a:r>
           </a:p>
         </p:txBody>
@@ -14300,7 +14811,7 @@
                 </a:solidFill>
                 <a:latin typeface="Roboto"/>
               </a:rPr>
-              <a:t>Slide 16 of 17</a:t>
+              <a:t>Slide 16 of 18</a:t>
             </a:r>
           </a:p>
         </p:txBody>
@@ -14456,7 +14967,7 @@
         </p:nvGraphicFramePr>
         <p:xfrm>
           <a:off x="457200" y="960120"/>
-          <a:ext cx="11277294" cy="932688"/>
+          <a:ext cx="11277294" cy="621792"/>
         </p:xfrm>
         <a:graphic>
           <a:graphicData uri="http://schemas.openxmlformats.org/drawingml/2006/table">
@@ -14576,62 +15087,6 @@
                   <a:tcPr>
                     <a:solidFill>
                       <a:srgbClr val="F7FAF7"/>
-                    </a:solidFill>
-                  </a:tcPr>
-                </a:tc>
-              </a:tr>
-              <a:tr h="310896">
-                <a:tc>
-                  <a:txBody>
-                    <a:bodyPr/>
-                    <a:lstStyle/>
-                    <a:p>
-                      <a:pPr algn="l">
-                        <a:defRPr>
-                          <a:latin typeface="Roboto"/>
-                        </a:defRPr>
-                      </a:pPr>
-                      <a:r>
-                        <a:rPr sz="1050">
-                          <a:solidFill>
-                            <a:srgbClr val="25342A"/>
-                          </a:solidFill>
-                          <a:latin typeface="Roboto"/>
-                        </a:rPr>
-                        <a:t>GST</a:t>
-                      </a:r>
-                    </a:p>
-                  </a:txBody>
-                  <a:tcPr>
-                    <a:solidFill>
-                      <a:srgbClr val="FFFFFF"/>
-                    </a:solidFill>
-                  </a:tcPr>
-                </a:tc>
-                <a:tc>
-                  <a:txBody>
-                    <a:bodyPr/>
-                    <a:lstStyle/>
-                    <a:p>
-                      <a:pPr algn="l">
-                        <a:defRPr>
-                          <a:latin typeface="Roboto"/>
-                        </a:defRPr>
-                      </a:pPr>
-                      <a:r>
-                        <a:rPr sz="1050">
-                          <a:solidFill>
-                            <a:srgbClr val="25342A"/>
-                          </a:solidFill>
-                          <a:latin typeface="Roboto"/>
-                        </a:rPr>
-                        <a:t>excluded throughout, for simplicity</a:t>
-                      </a:r>
-                    </a:p>
-                  </a:txBody>
-                  <a:tcPr>
-                    <a:solidFill>
-                      <a:srgbClr val="FFFFFF"/>
                     </a:solidFill>
                   </a:tcPr>
                 </a:tc>
@@ -14713,7 +15168,7 @@
                 </a:solidFill>
                 <a:latin typeface="Roboto"/>
               </a:rPr>
-              <a:t>Data retrieved 2pm, Tue 6 Oct 2026 · Generated 8 Oct 2026, 9:30pm · Sample data · Made with Python (python-pptx)</a:t>
+              <a:t>Data retrieved 2pm, Tue 6 Oct 2026 · Generated 9 Oct 2026, 8:45am · Sample data · Made with Python (python-pptx)</a:t>
             </a:r>
           </a:p>
         </p:txBody>
@@ -14752,7 +15207,627 @@
                 </a:solidFill>
                 <a:latin typeface="Roboto"/>
               </a:rPr>
-              <a:t>Slide 17 of 17</a:t>
+              <a:t>Slide 17 of 18</a:t>
+            </a:r>
+          </a:p>
+        </p:txBody>
+      </p:sp>
+    </p:spTree>
+  </p:cSld>
+  <p:clrMapOvr>
+    <a:masterClrMapping/>
+  </p:clrMapOvr>
+</p:sld>
+</file>
+
+<file path=ppt/slides/slide18.xml><?xml version="1.0" encoding="utf-8"?>
+<p:sld xmlns:a="http://schemas.openxmlformats.org/drawingml/2006/main" xmlns:p="http://schemas.openxmlformats.org/presentationml/2006/main" xmlns:r="http://schemas.openxmlformats.org/officeDocument/2006/relationships">
+  <p:cSld>
+    <p:spTree>
+      <p:nvGrpSpPr>
+        <p:cNvPr id="1" name=""/>
+        <p:cNvGrpSpPr/>
+        <p:nvPr/>
+      </p:nvGrpSpPr>
+      <p:grpSpPr/>
+      <p:sp>
+        <p:nvSpPr>
+          <p:cNvPr id="2" name="Title 1"/>
+          <p:cNvSpPr>
+            <a:spLocks noGrp="1"/>
+          </p:cNvSpPr>
+          <p:nvPr>
+            <p:ph type="title"/>
+          </p:nvPr>
+        </p:nvSpPr>
+        <p:spPr>
+          <a:xfrm>
+            <a:off x="457200" y="384048"/>
+            <a:ext cx="11277295" cy="475488"/>
+          </a:xfrm>
+        </p:spPr>
+        <p:txBody>
+          <a:bodyPr wrap="square" lIns="45720" rIns="45720" tIns="0" bIns="0" anchor="t"/>
+          <a:lstStyle/>
+          <a:p>
+            <a:pPr algn="l">
+              <a:defRPr>
+                <a:latin typeface="Roboto"/>
+              </a:defRPr>
+            </a:pPr>
+            <a:r>
+              <a:rPr sz="2400" b="1">
+                <a:solidFill>
+                  <a:srgbClr val="25342A"/>
+                </a:solidFill>
+                <a:latin typeface="Roboto"/>
+              </a:rPr>
+              <a:t>Assumptions: GST, BAS and payroll</a:t>
+            </a:r>
+          </a:p>
+        </p:txBody>
+      </p:sp>
+      <p:sp>
+        <p:nvSpPr>
+          <p:cNvPr id="3" name="Rectangle 2"/>
+          <p:cNvSpPr/>
+          <p:nvPr/>
+        </p:nvSpPr>
+        <p:spPr>
+          <a:xfrm>
+            <a:off x="0" y="0"/>
+            <a:ext cx="12191695" cy="73152"/>
+          </a:xfrm>
+          <a:prstGeom prst="rect">
+            <a:avLst/>
+          </a:prstGeom>
+          <a:solidFill>
+            <a:srgbClr val="2F7A5D"/>
+          </a:solidFill>
+          <a:ln>
+            <a:noFill/>
+          </a:ln>
+        </p:spPr>
+        <p:style>
+          <a:lnRef idx="1">
+            <a:schemeClr val="accent1"/>
+          </a:lnRef>
+          <a:fillRef idx="3">
+            <a:schemeClr val="accent1"/>
+          </a:fillRef>
+          <a:effectRef idx="2">
+            <a:schemeClr val="accent1"/>
+          </a:effectRef>
+          <a:fontRef idx="minor">
+            <a:schemeClr val="lt1"/>
+          </a:fontRef>
+        </p:style>
+        <p:txBody>
+          <a:bodyPr rtlCol="0" anchor="ctr"/>
+          <a:lstStyle/>
+          <a:p>
+            <a:pPr algn="ctr">
+              <a:defRPr>
+                <a:latin typeface="Roboto"/>
+              </a:defRPr>
+            </a:pPr>
+          </a:p>
+        </p:txBody>
+      </p:sp>
+      <p:sp>
+        <p:nvSpPr>
+          <p:cNvPr id="4" name="TextBox 3"/>
+          <p:cNvSpPr txBox="1"/>
+          <p:nvPr/>
+        </p:nvSpPr>
+        <p:spPr>
+          <a:xfrm>
+            <a:off x="457200" y="146304"/>
+            <a:ext cx="8229600" cy="256032"/>
+          </a:xfrm>
+          <a:prstGeom prst="rect">
+            <a:avLst/>
+          </a:prstGeom>
+          <a:noFill/>
+        </p:spPr>
+        <p:txBody>
+          <a:bodyPr wrap="square" lIns="45720" rIns="45720">
+            <a:spAutoFit/>
+          </a:bodyPr>
+          <a:lstStyle/>
+          <a:p>
+            <a:pPr>
+              <a:defRPr>
+                <a:latin typeface="Roboto"/>
+              </a:defRPr>
+            </a:pPr>
+            <a:r>
+              <a:rPr sz="1000" b="0">
+                <a:solidFill>
+                  <a:srgbClr val="5F6F63"/>
+                </a:solidFill>
+                <a:latin typeface="Roboto"/>
+              </a:rPr>
+              <a:t>Sample Advisory Pty Ltd · Monthly report pack, September 2026</a:t>
+            </a:r>
+          </a:p>
+        </p:txBody>
+      </p:sp>
+      <p:graphicFrame>
+        <p:nvGraphicFramePr>
+          <p:cNvPr id="5" name="Table 4"/>
+          <p:cNvGraphicFramePr>
+            <a:graphicFrameLocks noGrp="1"/>
+          </p:cNvGraphicFramePr>
+          <p:nvPr/>
+        </p:nvGraphicFramePr>
+        <p:xfrm>
+          <a:off x="457200" y="960120"/>
+          <a:ext cx="11277294" cy="1865376"/>
+        </p:xfrm>
+        <a:graphic>
+          <a:graphicData uri="http://schemas.openxmlformats.org/drawingml/2006/table">
+            <a:tbl>
+              <a:tblPr bandRow="1">
+                <a:tableStyleId>{5C22544A-7EE6-4342-B048-85BDC9FD1C3A}</a:tableStyleId>
+              </a:tblPr>
+              <a:tblGrid>
+                <a:gridCol w="3608734"/>
+                <a:gridCol w="7668560"/>
+              </a:tblGrid>
+              <a:tr h="310896">
+                <a:tc>
+                  <a:txBody>
+                    <a:bodyPr/>
+                    <a:lstStyle/>
+                    <a:p>
+                      <a:pPr algn="l">
+                        <a:defRPr>
+                          <a:latin typeface="Roboto"/>
+                        </a:defRPr>
+                      </a:pPr>
+                      <a:r>
+                        <a:rPr sz="1050">
+                          <a:solidFill>
+                            <a:srgbClr val="25342A"/>
+                          </a:solidFill>
+                          <a:latin typeface="Roboto"/>
+                        </a:rPr>
+                        <a:t>GST</a:t>
+                      </a:r>
+                    </a:p>
+                  </a:txBody>
+                  <a:tcPr>
+                    <a:solidFill>
+                      <a:srgbClr val="FFFFFF"/>
+                    </a:solidFill>
+                  </a:tcPr>
+                </a:tc>
+                <a:tc>
+                  <a:txBody>
+                    <a:bodyPr/>
+                    <a:lstStyle/>
+                    <a:p>
+                      <a:pPr algn="l">
+                        <a:defRPr>
+                          <a:latin typeface="Roboto"/>
+                        </a:defRPr>
+                      </a:pPr>
+                      <a:r>
+                        <a:rPr sz="1050">
+                          <a:solidFill>
+                            <a:srgbClr val="25342A"/>
+                          </a:solidFill>
+                          <a:latin typeface="Roboto"/>
+                        </a:rPr>
+                        <a:t>registered; 10%, accruals basis: GST on a sale is owed when it's invoiced, a credit on a bill is claimed when it's received. The P&amp;L excludes GST; invoices, bills, debtors, creditors and cash include it</a:t>
+                      </a:r>
+                    </a:p>
+                  </a:txBody>
+                  <a:tcPr>
+                    <a:solidFill>
+                      <a:srgbClr val="FFFFFF"/>
+                    </a:solidFill>
+                  </a:tcPr>
+                </a:tc>
+              </a:tr>
+              <a:tr h="310896">
+                <a:tc>
+                  <a:txBody>
+                    <a:bodyPr/>
+                    <a:lstStyle/>
+                    <a:p>
+                      <a:pPr algn="l">
+                        <a:defRPr>
+                          <a:latin typeface="Roboto"/>
+                        </a:defRPr>
+                      </a:pPr>
+                      <a:r>
+                        <a:rPr sz="1050">
+                          <a:solidFill>
+                            <a:srgbClr val="25342A"/>
+                          </a:solidFill>
+                          <a:latin typeface="Roboto"/>
+                        </a:rPr>
+                        <a:t>BAS</a:t>
+                      </a:r>
+                    </a:p>
+                  </a:txBody>
+                  <a:tcPr>
+                    <a:solidFill>
+                      <a:srgbClr val="F7FAF7"/>
+                    </a:solidFill>
+                  </a:tcPr>
+                </a:tc>
+                <a:tc>
+                  <a:txBody>
+                    <a:bodyPr/>
+                    <a:lstStyle/>
+                    <a:p>
+                      <a:pPr algn="l">
+                        <a:defRPr>
+                          <a:latin typeface="Roboto"/>
+                        </a:defRPr>
+                      </a:pPr>
+                      <a:r>
+                        <a:rPr sz="1050">
+                          <a:solidFill>
+                            <a:srgbClr val="25342A"/>
+                          </a:solidFill>
+                          <a:latin typeface="Roboto"/>
+                        </a:rPr>
+                        <a:t>quarterly, self-lodged: GST on sales − GST credits + PAYG withheld + PAYG instalment. July to September is due 28 October; October to December, 28 February</a:t>
+                      </a:r>
+                    </a:p>
+                  </a:txBody>
+                  <a:tcPr>
+                    <a:solidFill>
+                      <a:srgbClr val="F7FAF7"/>
+                    </a:solidFill>
+                  </a:tcPr>
+                </a:tc>
+              </a:tr>
+              <a:tr h="310896">
+                <a:tc>
+                  <a:txBody>
+                    <a:bodyPr/>
+                    <a:lstStyle/>
+                    <a:p>
+                      <a:pPr algn="l">
+                        <a:defRPr>
+                          <a:latin typeface="Roboto"/>
+                        </a:defRPr>
+                      </a:pPr>
+                      <a:r>
+                        <a:rPr sz="1050">
+                          <a:solidFill>
+                            <a:srgbClr val="25342A"/>
+                          </a:solidFill>
+                          <a:latin typeface="Roboto"/>
+                        </a:rPr>
+                        <a:t>Pay runs</a:t>
+                      </a:r>
+                    </a:p>
+                  </a:txBody>
+                  <a:tcPr>
+                    <a:solidFill>
+                      <a:srgbClr val="FFFFFF"/>
+                    </a:solidFill>
+                  </a:tcPr>
+                </a:tc>
+                <a:tc>
+                  <a:txBody>
+                    <a:bodyPr/>
+                    <a:lstStyle/>
+                    <a:p>
+                      <a:pPr algn="l">
+                        <a:defRPr>
+                          <a:latin typeface="Roboto"/>
+                        </a:defRPr>
+                      </a:pPr>
+                      <a:r>
+                        <a:rPr sz="1050">
+                          <a:solidFill>
+                            <a:srgbClr val="25342A"/>
+                          </a:solidFill>
+                          <a:latin typeface="Roboto"/>
+                        </a:rPr>
+                        <a:t>fortnightly on Thursdays: $33,205 gross (a 26th of the year's gross wages); net pay $25,236 and super $3,985 paid on the day; PAYG withheld (about 24% of gross, $7,969) goes with the BAS. Two months a year have three pay runs</a:t>
+                      </a:r>
+                    </a:p>
+                  </a:txBody>
+                  <a:tcPr>
+                    <a:solidFill>
+                      <a:srgbClr val="FFFFFF"/>
+                    </a:solidFill>
+                  </a:tcPr>
+                </a:tc>
+              </a:tr>
+              <a:tr h="310896">
+                <a:tc>
+                  <a:txBody>
+                    <a:bodyPr/>
+                    <a:lstStyle/>
+                    <a:p>
+                      <a:pPr algn="l">
+                        <a:defRPr>
+                          <a:latin typeface="Roboto"/>
+                        </a:defRPr>
+                      </a:pPr>
+                      <a:r>
+                        <a:rPr sz="1050">
+                          <a:solidFill>
+                            <a:srgbClr val="25342A"/>
+                          </a:solidFill>
+                          <a:latin typeface="Roboto"/>
+                        </a:rPr>
+                        <a:t>Super</a:t>
+                      </a:r>
+                    </a:p>
+                  </a:txBody>
+                  <a:tcPr>
+                    <a:solidFill>
+                      <a:srgbClr val="F7FAF7"/>
+                    </a:solidFill>
+                  </a:tcPr>
+                </a:tc>
+                <a:tc>
+                  <a:txBody>
+                    <a:bodyPr/>
+                    <a:lstStyle/>
+                    <a:p>
+                      <a:pPr algn="l">
+                        <a:defRPr>
+                          <a:latin typeface="Roboto"/>
+                        </a:defRPr>
+                      </a:pPr>
+                      <a:r>
+                        <a:rPr sz="1050">
+                          <a:solidFill>
+                            <a:srgbClr val="25342A"/>
+                          </a:solidFill>
+                          <a:latin typeface="Roboto"/>
+                        </a:rPr>
+                        <a:t>12% of gross wages, paid with each pay run (Payday Super, from 1 July 2026)</a:t>
+                      </a:r>
+                    </a:p>
+                  </a:txBody>
+                  <a:tcPr>
+                    <a:solidFill>
+                      <a:srgbClr val="F7FAF7"/>
+                    </a:solidFill>
+                  </a:tcPr>
+                </a:tc>
+              </a:tr>
+              <a:tr h="310896">
+                <a:tc>
+                  <a:txBody>
+                    <a:bodyPr/>
+                    <a:lstStyle/>
+                    <a:p>
+                      <a:pPr algn="l">
+                        <a:defRPr>
+                          <a:latin typeface="Roboto"/>
+                        </a:defRPr>
+                      </a:pPr>
+                      <a:r>
+                        <a:rPr sz="1050">
+                          <a:solidFill>
+                            <a:srgbClr val="25342A"/>
+                          </a:solidFill>
+                          <a:latin typeface="Roboto"/>
+                        </a:rPr>
+                        <a:t>Payroll tax</a:t>
+                      </a:r>
+                    </a:p>
+                  </a:txBody>
+                  <a:tcPr>
+                    <a:solidFill>
+                      <a:srgbClr val="FFFFFF"/>
+                    </a:solidFill>
+                  </a:tcPr>
+                </a:tc>
+                <a:tc>
+                  <a:txBody>
+                    <a:bodyPr/>
+                    <a:lstStyle/>
+                    <a:p>
+                      <a:pPr algn="l">
+                        <a:defRPr>
+                          <a:latin typeface="Roboto"/>
+                        </a:defRPr>
+                      </a:pPr>
+                      <a:r>
+                        <a:rPr sz="1050">
+                          <a:solidFill>
+                            <a:srgbClr val="25342A"/>
+                          </a:solidFill>
+                          <a:latin typeface="Roboto"/>
+                        </a:rPr>
+                        <a:t>none: Queensland's threshold is $1.3 million of wages a year (rate 4.75% above it); this business pays about $967,000 including super</a:t>
+                      </a:r>
+                    </a:p>
+                  </a:txBody>
+                  <a:tcPr>
+                    <a:solidFill>
+                      <a:srgbClr val="FFFFFF"/>
+                    </a:solidFill>
+                  </a:tcPr>
+                </a:tc>
+              </a:tr>
+              <a:tr h="310896">
+                <a:tc>
+                  <a:txBody>
+                    <a:bodyPr/>
+                    <a:lstStyle/>
+                    <a:p>
+                      <a:pPr algn="l">
+                        <a:defRPr>
+                          <a:latin typeface="Roboto"/>
+                        </a:defRPr>
+                      </a:pPr>
+                      <a:r>
+                        <a:rPr sz="1050">
+                          <a:solidFill>
+                            <a:srgbClr val="25342A"/>
+                          </a:solidFill>
+                          <a:latin typeface="Roboto"/>
+                        </a:rPr>
+                        <a:t>Banking days</a:t>
+                      </a:r>
+                    </a:p>
+                  </a:txBody>
+                  <a:tcPr>
+                    <a:solidFill>
+                      <a:srgbClr val="F7FAF7"/>
+                    </a:solidFill>
+                  </a:tcPr>
+                </a:tc>
+                <a:tc>
+                  <a:txBody>
+                    <a:bodyPr/>
+                    <a:lstStyle/>
+                    <a:p>
+                      <a:pPr algn="l">
+                        <a:defRPr>
+                          <a:latin typeface="Roboto"/>
+                        </a:defRPr>
+                      </a:pPr>
+                      <a:r>
+                        <a:rPr sz="1050">
+                          <a:solidFill>
+                            <a:srgbClr val="25342A"/>
+                          </a:solidFill>
+                          <a:latin typeface="Roboto"/>
+                        </a:rPr>
+                        <a:t>money only moves on banking days: a payment due on a weekend or Queensland public holiday moves to the next banking day</a:t>
+                      </a:r>
+                    </a:p>
+                  </a:txBody>
+                  <a:tcPr>
+                    <a:solidFill>
+                      <a:srgbClr val="F7FAF7"/>
+                    </a:solidFill>
+                  </a:tcPr>
+                </a:tc>
+              </a:tr>
+            </a:tbl>
+          </a:graphicData>
+        </a:graphic>
+      </p:graphicFrame>
+      <p:sp>
+        <p:nvSpPr>
+          <p:cNvPr id="6" name="TextBox 5"/>
+          <p:cNvSpPr txBox="1"/>
+          <p:nvPr/>
+        </p:nvSpPr>
+        <p:spPr>
+          <a:xfrm>
+            <a:off x="457200" y="6492240"/>
+            <a:ext cx="2926080" cy="274320"/>
+          </a:xfrm>
+          <a:prstGeom prst="rect">
+            <a:avLst/>
+          </a:prstGeom>
+          <a:noFill/>
+        </p:spPr>
+        <p:txBody>
+          <a:bodyPr wrap="square" lIns="45720" rIns="45720">
+            <a:spAutoFit/>
+          </a:bodyPr>
+          <a:lstStyle/>
+          <a:p>
+            <a:pPr>
+              <a:defRPr>
+                <a:latin typeface="Roboto"/>
+              </a:defRPr>
+            </a:pPr>
+            <a:r>
+              <a:rPr sz="900" b="0">
+                <a:solidFill>
+                  <a:srgbClr val="5F6F63"/>
+                </a:solidFill>
+                <a:latin typeface="Roboto"/>
+              </a:rPr>
+              <a:t>services-sample-statements.pptx</a:t>
+            </a:r>
+          </a:p>
+        </p:txBody>
+      </p:sp>
+      <p:sp>
+        <p:nvSpPr>
+          <p:cNvPr id="7" name="TextBox 6"/>
+          <p:cNvSpPr txBox="1"/>
+          <p:nvPr/>
+        </p:nvSpPr>
+        <p:spPr>
+          <a:xfrm>
+            <a:off x="3108960" y="6492240"/>
+            <a:ext cx="5943600" cy="274320"/>
+          </a:xfrm>
+          <a:prstGeom prst="rect">
+            <a:avLst/>
+          </a:prstGeom>
+          <a:noFill/>
+        </p:spPr>
+        <p:txBody>
+          <a:bodyPr wrap="square" lIns="45720" rIns="45720">
+            <a:spAutoFit/>
+          </a:bodyPr>
+          <a:lstStyle/>
+          <a:p>
+            <a:pPr algn="ctr">
+              <a:defRPr>
+                <a:latin typeface="Roboto"/>
+              </a:defRPr>
+            </a:pPr>
+            <a:r>
+              <a:rPr sz="900" b="0">
+                <a:solidFill>
+                  <a:srgbClr val="5F6F63"/>
+                </a:solidFill>
+                <a:latin typeface="Roboto"/>
+              </a:rPr>
+              <a:t>Data retrieved 2pm, Tue 6 Oct 2026 · Generated 9 Oct 2026, 8:45am · Sample data · Made with Python (python-pptx)</a:t>
+            </a:r>
+          </a:p>
+        </p:txBody>
+      </p:sp>
+      <p:sp>
+        <p:nvSpPr>
+          <p:cNvPr id="8" name="TextBox 7"/>
+          <p:cNvSpPr txBox="1"/>
+          <p:nvPr/>
+        </p:nvSpPr>
+        <p:spPr>
+          <a:xfrm>
+            <a:off x="8503920" y="6492240"/>
+            <a:ext cx="3200400" cy="274320"/>
+          </a:xfrm>
+          <a:prstGeom prst="rect">
+            <a:avLst/>
+          </a:prstGeom>
+          <a:noFill/>
+        </p:spPr>
+        <p:txBody>
+          <a:bodyPr wrap="square" lIns="45720" rIns="45720">
+            <a:spAutoFit/>
+          </a:bodyPr>
+          <a:lstStyle/>
+          <a:p>
+            <a:pPr algn="r">
+              <a:defRPr>
+                <a:latin typeface="Roboto"/>
+              </a:defRPr>
+            </a:pPr>
+            <a:r>
+              <a:rPr sz="900" b="0">
+                <a:solidFill>
+                  <a:srgbClr val="5F6F63"/>
+                </a:solidFill>
+                <a:latin typeface="Roboto"/>
+              </a:rPr>
+              <a:t>Slide 18 of 18</a:t>
             </a:r>
           </a:p>
         </p:txBody>
@@ -15182,11 +16257,11 @@
             <a:r>
               <a:rPr sz="2600" b="1">
                 <a:solidFill>
-                  <a:srgbClr val="2F7A5D"/>
+                  <a:srgbClr val="B42318"/>
                 </a:solidFill>
                 <a:latin typeface="Roboto"/>
               </a:rPr>
-              <a:t>$173</a:t>
+              <a:t>$190</a:t>
             </a:r>
           </a:p>
         </p:txBody>
@@ -15225,7 +16300,7 @@
                 </a:solidFill>
                 <a:latin typeface="Roboto"/>
               </a:rPr>
-              <a:t>■ same as Aug ($173)</a:t>
+              <a:t>▼ from $191 in Aug</a:t>
             </a:r>
           </a:p>
         </p:txBody>
@@ -15352,7 +16427,7 @@
                 </a:solidFill>
                 <a:latin typeface="Roboto"/>
               </a:rPr>
-              <a:t>$216,090</a:t>
+              <a:t>$251,402</a:t>
             </a:r>
           </a:p>
         </p:txBody>
@@ -15391,7 +16466,7 @@
                 </a:solidFill>
                 <a:latin typeface="Roboto"/>
               </a:rPr>
-              <a:t>▲ from $149,190 in Aug</a:t>
+              <a:t>▲ from $172,405 in Aug</a:t>
             </a:r>
           </a:p>
         </p:txBody>
@@ -15469,7 +16544,7 @@
                 </a:solidFill>
                 <a:latin typeface="Roboto"/>
               </a:rPr>
-              <a:t>Data retrieved 2pm, Tue 6 Oct 2026 · Generated 8 Oct 2026, 9:30pm · Sample data · Made with Python (python-pptx)</a:t>
+              <a:t>Data retrieved 2pm, Tue 6 Oct 2026 · Generated 9 Oct 2026, 8:45am · Sample data · Made with Python (python-pptx)</a:t>
             </a:r>
           </a:p>
         </p:txBody>
@@ -15508,7 +16583,7 @@
                 </a:solidFill>
                 <a:latin typeface="Roboto"/>
               </a:rPr>
-              <a:t>Slide 2 of 17</a:t>
+              <a:t>Slide 2 of 18</a:t>
             </a:r>
           </a:p>
         </p:txBody>
@@ -15719,7 +16794,7 @@
         </p:nvCxnSpPr>
         <p:spPr>
           <a:xfrm>
-            <a:off x="6625053" y="1599255"/>
+            <a:off x="6565025" y="1599255"/>
             <a:ext cx="0" cy="3816827"/>
           </a:xfrm>
           <a:prstGeom prst="line">
@@ -15755,7 +16830,7 @@
         </p:nvSpPr>
         <p:spPr>
           <a:xfrm>
-            <a:off x="5527773" y="5416082"/>
+            <a:off x="5467745" y="5416082"/>
             <a:ext cx="2194560" cy="237744"/>
           </a:xfrm>
           <a:prstGeom prst="rect">
@@ -15898,7 +16973,7 @@
                 </a:solidFill>
                 <a:latin typeface="Roboto"/>
               </a:rPr>
-              <a:t>Data retrieved 2pm, Tue 6 Oct 2026 · Generated 8 Oct 2026, 9:30pm · Sample data · Made with Python (python-pptx)</a:t>
+              <a:t>Data retrieved 2pm, Tue 6 Oct 2026 · Generated 9 Oct 2026, 8:45am · Sample data · Made with Python (python-pptx)</a:t>
             </a:r>
           </a:p>
         </p:txBody>
@@ -15937,7 +17012,7 @@
                 </a:solidFill>
                 <a:latin typeface="Roboto"/>
               </a:rPr>
-              <a:t>Slide 3 of 17</a:t>
+              <a:t>Slide 3 of 18</a:t>
             </a:r>
           </a:p>
         </p:txBody>
@@ -16252,7 +17327,7 @@
                 </a:solidFill>
                 <a:latin typeface="Roboto"/>
               </a:rPr>
-              <a:t>Data retrieved 2pm, Tue 6 Oct 2026 · Generated 8 Oct 2026, 9:30pm · Sample data · Made with Python (python-pptx)</a:t>
+              <a:t>Data retrieved 2pm, Tue 6 Oct 2026 · Generated 9 Oct 2026, 8:45am · Sample data · Made with Python (python-pptx)</a:t>
             </a:r>
           </a:p>
         </p:txBody>
@@ -16291,7 +17366,7 @@
                 </a:solidFill>
                 <a:latin typeface="Roboto"/>
               </a:rPr>
-              <a:t>Slide 4 of 17</a:t>
+              <a:t>Slide 4 of 18</a:t>
             </a:r>
           </a:p>
         </p:txBody>
@@ -17148,7 +18223,7 @@
                 </a:solidFill>
                 <a:latin typeface="Roboto"/>
               </a:rPr>
-              <a:t>Data retrieved 2pm, Tue 6 Oct 2026 · Generated 8 Oct 2026, 9:30pm · Sample data · Made with Python (python-pptx)</a:t>
+              <a:t>Data retrieved 2pm, Tue 6 Oct 2026 · Generated 9 Oct 2026, 8:45am · Sample data · Made with Python (python-pptx)</a:t>
             </a:r>
           </a:p>
         </p:txBody>
@@ -17187,7 +18262,7 @@
                 </a:solidFill>
                 <a:latin typeface="Roboto"/>
               </a:rPr>
-              <a:t>Slide 5 of 17</a:t>
+              <a:t>Slide 5 of 18</a:t>
             </a:r>
           </a:p>
         </p:txBody>
@@ -17514,7 +18589,7 @@
                           </a:solidFill>
                           <a:latin typeface="Roboto"/>
                         </a:rPr>
-                        <a:t>$131,850</a:t>
+                        <a:t>$145,330</a:t>
                       </a:r>
                     </a:p>
                   </a:txBody>
@@ -17541,7 +18616,7 @@
                           </a:solidFill>
                           <a:latin typeface="Roboto"/>
                         </a:rPr>
-                        <a:t>$114,640</a:t>
+                        <a:t>$126,500</a:t>
                       </a:r>
                     </a:p>
                   </a:txBody>
@@ -17680,7 +18755,7 @@
                           </a:solidFill>
                           <a:latin typeface="Roboto"/>
                         </a:rPr>
-                        <a:t>$173</a:t>
+                        <a:t>$190</a:t>
                       </a:r>
                     </a:p>
                   </a:txBody>
@@ -17707,7 +18782,7 @@
                           </a:solidFill>
                           <a:latin typeface="Roboto"/>
                         </a:rPr>
-                        <a:t>$173</a:t>
+                        <a:t>$191</a:t>
                       </a:r>
                     </a:p>
                   </a:txBody>
@@ -17795,7 +18870,7 @@
                 </a:solidFill>
                 <a:latin typeface="Roboto"/>
               </a:rPr>
-              <a:t>Data retrieved 2pm, Tue 6 Oct 2026 · Generated 8 Oct 2026, 9:30pm · Sample data · Made with Python (python-pptx)</a:t>
+              <a:t>Data retrieved 2pm, Tue 6 Oct 2026 · Generated 9 Oct 2026, 8:45am · Sample data · Made with Python (python-pptx)</a:t>
             </a:r>
           </a:p>
         </p:txBody>
@@ -17834,7 +18909,7 @@
                 </a:solidFill>
                 <a:latin typeface="Roboto"/>
               </a:rPr>
-              <a:t>Slide 6 of 17</a:t>
+              <a:t>Slide 6 of 18</a:t>
             </a:r>
           </a:p>
         </p:txBody>
@@ -18161,7 +19236,7 @@
                           </a:solidFill>
                           <a:latin typeface="Roboto"/>
                         </a:rPr>
-                        <a:t>$99,290</a:t>
+                        <a:t>$109,810</a:t>
                       </a:r>
                     </a:p>
                   </a:txBody>
@@ -18188,7 +19263,7 @@
                           </a:solidFill>
                           <a:latin typeface="Roboto"/>
                         </a:rPr>
-                        <a:t>$77,900</a:t>
+                        <a:t>$86,000</a:t>
                       </a:r>
                     </a:p>
                   </a:txBody>
@@ -18244,7 +19319,7 @@
                           </a:solidFill>
                           <a:latin typeface="Roboto"/>
                         </a:rPr>
-                        <a:t>$116,800</a:t>
+                        <a:t>$141,592</a:t>
                       </a:r>
                     </a:p>
                   </a:txBody>
@@ -18271,7 +19346,7 @@
                           </a:solidFill>
                           <a:latin typeface="Roboto"/>
                         </a:rPr>
-                        <a:t>$71,290</a:t>
+                        <a:t>$86,405</a:t>
                       </a:r>
                     </a:p>
                   </a:txBody>
@@ -18327,7 +19402,7 @@
                           </a:solidFill>
                           <a:latin typeface="Roboto"/>
                         </a:rPr>
-                        <a:t>$216,090</a:t>
+                        <a:t>$251,402</a:t>
                       </a:r>
                     </a:p>
                   </a:txBody>
@@ -18354,7 +19429,7 @@
                           </a:solidFill>
                           <a:latin typeface="Roboto"/>
                         </a:rPr>
-                        <a:t>$149,190</a:t>
+                        <a:t>$172,405</a:t>
                       </a:r>
                     </a:p>
                   </a:txBody>
@@ -18442,7 +19517,7 @@
                 </a:solidFill>
                 <a:latin typeface="Roboto"/>
               </a:rPr>
-              <a:t>Data retrieved 2pm, Tue 6 Oct 2026 · Generated 8 Oct 2026, 9:30pm · Sample data · Made with Python (python-pptx)</a:t>
+              <a:t>Data retrieved 2pm, Tue 6 Oct 2026 · Generated 9 Oct 2026, 8:45am · Sample data · Made with Python (python-pptx)</a:t>
             </a:r>
           </a:p>
         </p:txBody>
@@ -18481,7 +19556,7 @@
                 </a:solidFill>
                 <a:latin typeface="Roboto"/>
               </a:rPr>
-              <a:t>Slide 7 of 17</a:t>
+              <a:t>Slide 7 of 18</a:t>
             </a:r>
           </a:p>
         </p:txBody>
@@ -18806,7 +19881,7 @@
                           </a:solidFill>
                           <a:latin typeface="Roboto"/>
                         </a:rPr>
-                        <a:t>85,950</a:t>
+                        <a:t>94,830</a:t>
                       </a:r>
                     </a:p>
                   </a:txBody>
@@ -18833,7 +19908,7 @@
                           </a:solidFill>
                           <a:latin typeface="Roboto"/>
                         </a:rPr>
-                        <a:t>75,740</a:t>
+                        <a:t>83,800</a:t>
                       </a:r>
                     </a:p>
                   </a:txBody>
@@ -18860,7 +19935,7 @@
                           </a:solidFill>
                           <a:latin typeface="Roboto"/>
                         </a:rPr>
-                        <a:t>10,210</a:t>
+                        <a:t>11,030</a:t>
                       </a:r>
                     </a:p>
                   </a:txBody>
@@ -18916,7 +19991,7 @@
                           </a:solidFill>
                           <a:latin typeface="Roboto"/>
                         </a:rPr>
-                        <a:t>32,500</a:t>
+                        <a:t>35,700</a:t>
                       </a:r>
                     </a:p>
                   </a:txBody>
@@ -18943,7 +20018,7 @@
                           </a:solidFill>
                           <a:latin typeface="Roboto"/>
                         </a:rPr>
-                        <a:t>32,500</a:t>
+                        <a:t>35,700</a:t>
                       </a:r>
                     </a:p>
                   </a:txBody>
@@ -19026,7 +20101,7 @@
                           </a:solidFill>
                           <a:latin typeface="Roboto"/>
                         </a:rPr>
-                        <a:t>13,400</a:t>
+                        <a:t>14,800</a:t>
                       </a:r>
                     </a:p>
                   </a:txBody>
@@ -19053,7 +20128,7 @@
                           </a:solidFill>
                           <a:latin typeface="Roboto"/>
                         </a:rPr>
-                        <a:t>6,400</a:t>
+                        <a:t>7,000</a:t>
                       </a:r>
                     </a:p>
                   </a:txBody>
@@ -19080,7 +20155,7 @@
                           </a:solidFill>
                           <a:latin typeface="Roboto"/>
                         </a:rPr>
-                        <a:t>7,000</a:t>
+                        <a:t>7,800</a:t>
                       </a:r>
                     </a:p>
                   </a:txBody>
@@ -19136,7 +20211,7 @@
                           </a:solidFill>
                           <a:latin typeface="Roboto"/>
                         </a:rPr>
-                        <a:t>131,850</a:t>
+                        <a:t>145,330</a:t>
                       </a:r>
                     </a:p>
                   </a:txBody>
@@ -19163,7 +20238,7 @@
                           </a:solidFill>
                           <a:latin typeface="Roboto"/>
                         </a:rPr>
-                        <a:t>114,640</a:t>
+                        <a:t>126,500</a:t>
                       </a:r>
                     </a:p>
                   </a:txBody>
@@ -19190,7 +20265,7 @@
                           </a:solidFill>
                           <a:latin typeface="Roboto"/>
                         </a:rPr>
-                        <a:t>17,210</a:t>
+                        <a:t>18,830</a:t>
                       </a:r>
                     </a:p>
                   </a:txBody>
@@ -19246,7 +20321,7 @@
                           </a:solidFill>
                           <a:latin typeface="Roboto"/>
                         </a:rPr>
-                        <a:t>(46,500)</a:t>
+                        <a:t>(60,192)</a:t>
                       </a:r>
                     </a:p>
                   </a:txBody>
@@ -19273,7 +20348,7 @@
                           </a:solidFill>
                           <a:latin typeface="Roboto"/>
                         </a:rPr>
-                        <a:t>(46,500)</a:t>
+                        <a:t>(54,720)</a:t>
                       </a:r>
                     </a:p>
                   </a:txBody>
@@ -19296,11 +20371,11 @@
                       <a:r>
                         <a:rPr sz="1050">
                           <a:solidFill>
-                            <a:srgbClr val="25342A"/>
-                          </a:solidFill>
-                          <a:latin typeface="Roboto"/>
-                        </a:rPr>
-                        <a:t>-</a:t>
+                            <a:srgbClr val="B42318"/>
+                          </a:solidFill>
+                          <a:latin typeface="Roboto"/>
+                        </a:rPr>
+                        <a:t>(5,472)</a:t>
                       </a:r>
                     </a:p>
                   </a:txBody>
@@ -19466,7 +20541,7 @@
                           </a:solidFill>
                           <a:latin typeface="Roboto"/>
                         </a:rPr>
-                        <a:t>(64,100)</a:t>
+                        <a:t>(77,792)</a:t>
                       </a:r>
                     </a:p>
                   </a:txBody>
@@ -19493,7 +20568,7 @@
                           </a:solidFill>
                           <a:latin typeface="Roboto"/>
                         </a:rPr>
-                        <a:t>(53,400)</a:t>
+                        <a:t>(61,620)</a:t>
                       </a:r>
                     </a:p>
                   </a:txBody>
@@ -19520,7 +20595,7 @@
                           </a:solidFill>
                           <a:latin typeface="Roboto"/>
                         </a:rPr>
-                        <a:t>(10,700)</a:t>
+                        <a:t>(16,172)</a:t>
                       </a:r>
                     </a:p>
                   </a:txBody>
@@ -19576,7 +20651,7 @@
                           </a:solidFill>
                           <a:latin typeface="Roboto"/>
                         </a:rPr>
-                        <a:t>67,750</a:t>
+                        <a:t>67,538</a:t>
                       </a:r>
                     </a:p>
                   </a:txBody>
@@ -19603,7 +20678,7 @@
                           </a:solidFill>
                           <a:latin typeface="Roboto"/>
                         </a:rPr>
-                        <a:t>61,240</a:t>
+                        <a:t>64,880</a:t>
                       </a:r>
                     </a:p>
                   </a:txBody>
@@ -19630,7 +20705,7 @@
                           </a:solidFill>
                           <a:latin typeface="Roboto"/>
                         </a:rPr>
-                        <a:t>6,510</a:t>
+                        <a:t>2,658</a:t>
                       </a:r>
                     </a:p>
                   </a:txBody>
@@ -20378,7 +21453,7 @@
                 </a:solidFill>
                 <a:latin typeface="Roboto"/>
               </a:rPr>
-              <a:t>Data retrieved 2pm, Tue 6 Oct 2026 · Generated 8 Oct 2026, 9:30pm · Sample data · Made with Python (python-pptx)</a:t>
+              <a:t>Data retrieved 2pm, Tue 6 Oct 2026 · Generated 9 Oct 2026, 8:45am · Sample data · Made with Python (python-pptx)</a:t>
             </a:r>
           </a:p>
         </p:txBody>
@@ -20417,7 +21492,7 @@
                 </a:solidFill>
                 <a:latin typeface="Roboto"/>
               </a:rPr>
-              <a:t>Slide 8 of 17</a:t>
+              <a:t>Slide 8 of 18</a:t>
             </a:r>
           </a:p>
         </p:txBody>
@@ -20962,7 +22037,7 @@
                           </a:solidFill>
                           <a:latin typeface="Roboto"/>
                         </a:rPr>
-                        <a:t>17,850</a:t>
+                        <a:t>17,638</a:t>
                       </a:r>
                     </a:p>
                   </a:txBody>
@@ -20989,7 +22064,7 @@
                           </a:solidFill>
                           <a:latin typeface="Roboto"/>
                         </a:rPr>
-                        <a:t>9,840</a:t>
+                        <a:t>13,480</a:t>
                       </a:r>
                     </a:p>
                   </a:txBody>
@@ -21016,7 +22091,7 @@
                           </a:solidFill>
                           <a:latin typeface="Roboto"/>
                         </a:rPr>
-                        <a:t>8,010</a:t>
+                        <a:t>4,158</a:t>
                       </a:r>
                     </a:p>
                   </a:txBody>
@@ -21292,7 +22367,7 @@
                           </a:solidFill>
                           <a:latin typeface="Roboto"/>
                         </a:rPr>
-                        <a:t>15,610</a:t>
+                        <a:t>15,398</a:t>
                       </a:r>
                     </a:p>
                   </a:txBody>
@@ -21319,7 +22394,7 @@
                           </a:solidFill>
                           <a:latin typeface="Roboto"/>
                         </a:rPr>
-                        <a:t>7,590</a:t>
+                        <a:t>11,230</a:t>
                       </a:r>
                     </a:p>
                   </a:txBody>
@@ -21346,7 +22421,7 @@
                           </a:solidFill>
                           <a:latin typeface="Roboto"/>
                         </a:rPr>
-                        <a:t>8,020</a:t>
+                        <a:t>4,168</a:t>
                       </a:r>
                     </a:p>
                   </a:txBody>
@@ -21402,7 +22477,7 @@
                           </a:solidFill>
                           <a:latin typeface="Roboto"/>
                         </a:rPr>
-                        <a:t>(3,903)</a:t>
+                        <a:t>(3,850)</a:t>
                       </a:r>
                     </a:p>
                   </a:txBody>
@@ -21429,7 +22504,7 @@
                           </a:solidFill>
                           <a:latin typeface="Roboto"/>
                         </a:rPr>
-                        <a:t>(1,898)</a:t>
+                        <a:t>(2,808)</a:t>
                       </a:r>
                     </a:p>
                   </a:txBody>
@@ -21456,7 +22531,7 @@
                           </a:solidFill>
                           <a:latin typeface="Roboto"/>
                         </a:rPr>
-                        <a:t>(2,005)</a:t>
+                        <a:t>(1,042)</a:t>
                       </a:r>
                     </a:p>
                   </a:txBody>
@@ -21512,7 +22587,7 @@
                           </a:solidFill>
                           <a:latin typeface="Roboto"/>
                         </a:rPr>
-                        <a:t>11,707</a:t>
+                        <a:t>11,548</a:t>
                       </a:r>
                     </a:p>
                   </a:txBody>
@@ -21539,7 +22614,7 @@
                           </a:solidFill>
                           <a:latin typeface="Roboto"/>
                         </a:rPr>
-                        <a:t>5,692</a:t>
+                        <a:t>8,422</a:t>
                       </a:r>
                     </a:p>
                   </a:txBody>
@@ -21566,7 +22641,7 @@
                           </a:solidFill>
                           <a:latin typeface="Roboto"/>
                         </a:rPr>
-                        <a:t>6,015</a:t>
+                        <a:t>3,126</a:t>
                       </a:r>
                     </a:p>
                   </a:txBody>
@@ -21654,7 +22729,7 @@
                 </a:solidFill>
                 <a:latin typeface="Roboto"/>
               </a:rPr>
-              <a:t>Data retrieved 2pm, Tue 6 Oct 2026 · Generated 8 Oct 2026, 9:30pm · Sample data · Made with Python (python-pptx)</a:t>
+              <a:t>Data retrieved 2pm, Tue 6 Oct 2026 · Generated 9 Oct 2026, 8:45am · Sample data · Made with Python (python-pptx)</a:t>
             </a:r>
           </a:p>
         </p:txBody>
@@ -21693,7 +22768,7 @@
                 </a:solidFill>
                 <a:latin typeface="Roboto"/>
               </a:rPr>
-              <a:t>Slide 9 of 17</a:t>
+              <a:t>Slide 9 of 18</a:t>
             </a:r>
           </a:p>
         </p:txBody>
